--- a/SM6/Theory of Automata/Slides/Lecture 2 slides.pptx
+++ b/SM6/Theory of Automata/Slides/Lecture 2 slides.pptx
@@ -5,7 +5,7 @@
     <p:sldMasterId id="2147483648" r:id="rId1"/>
   </p:sldMasterIdLst>
   <p:notesMasterIdLst>
-    <p:notesMasterId r:id="rId26"/>
+    <p:notesMasterId r:id="rId33"/>
   </p:notesMasterIdLst>
   <p:sldIdLst>
     <p:sldId id="324" r:id="rId2"/>
@@ -13,25 +13,32 @@
     <p:sldId id="256" r:id="rId4"/>
     <p:sldId id="257" r:id="rId5"/>
     <p:sldId id="390" r:id="rId6"/>
-    <p:sldId id="395" r:id="rId7"/>
-    <p:sldId id="406" r:id="rId8"/>
-    <p:sldId id="416" r:id="rId9"/>
-    <p:sldId id="407" r:id="rId10"/>
-    <p:sldId id="408" r:id="rId11"/>
-    <p:sldId id="400" r:id="rId12"/>
-    <p:sldId id="401" r:id="rId13"/>
-    <p:sldId id="402" r:id="rId14"/>
-    <p:sldId id="403" r:id="rId15"/>
-    <p:sldId id="404" r:id="rId16"/>
-    <p:sldId id="405" r:id="rId17"/>
-    <p:sldId id="409" r:id="rId18"/>
-    <p:sldId id="410" r:id="rId19"/>
-    <p:sldId id="411" r:id="rId20"/>
-    <p:sldId id="412" r:id="rId21"/>
-    <p:sldId id="413" r:id="rId22"/>
-    <p:sldId id="414" r:id="rId23"/>
-    <p:sldId id="415" r:id="rId24"/>
-    <p:sldId id="396" r:id="rId25"/>
+    <p:sldId id="417" r:id="rId7"/>
+    <p:sldId id="418" r:id="rId8"/>
+    <p:sldId id="419" r:id="rId9"/>
+    <p:sldId id="422" r:id="rId10"/>
+    <p:sldId id="395" r:id="rId11"/>
+    <p:sldId id="406" r:id="rId12"/>
+    <p:sldId id="416" r:id="rId13"/>
+    <p:sldId id="407" r:id="rId14"/>
+    <p:sldId id="408" r:id="rId15"/>
+    <p:sldId id="400" r:id="rId16"/>
+    <p:sldId id="401" r:id="rId17"/>
+    <p:sldId id="402" r:id="rId18"/>
+    <p:sldId id="403" r:id="rId19"/>
+    <p:sldId id="404" r:id="rId20"/>
+    <p:sldId id="405" r:id="rId21"/>
+    <p:sldId id="409" r:id="rId22"/>
+    <p:sldId id="410" r:id="rId23"/>
+    <p:sldId id="411" r:id="rId24"/>
+    <p:sldId id="412" r:id="rId25"/>
+    <p:sldId id="413" r:id="rId26"/>
+    <p:sldId id="414" r:id="rId27"/>
+    <p:sldId id="415" r:id="rId28"/>
+    <p:sldId id="420" r:id="rId29"/>
+    <p:sldId id="397" r:id="rId30"/>
+    <p:sldId id="421" r:id="rId31"/>
+    <p:sldId id="396" r:id="rId32"/>
   </p:sldIdLst>
   <p:sldSz cx="12192000" cy="6858000"/>
   <p:notesSz cx="6858000" cy="9144000"/>
@@ -226,7 +233,7 @@
           <a:p>
             <a:fld id="{70079CEE-7766-467A-AD48-D068D9C9E519}" type="datetimeFigureOut">
               <a:rPr lang="en-US" smtClean="0"/>
-              <a:t>2/12/2026</a:t>
+              <a:t>2/17/2026</a:t>
             </a:fld>
             <a:endParaRPr lang="en-US"/>
           </a:p>
@@ -617,7 +624,7 @@
           <a:p>
             <a:fld id="{6E5A18B4-2029-423F-AF07-FF085EF6276F}" type="datetimeFigureOut">
               <a:rPr lang="en-US" smtClean="0"/>
-              <a:t>2/12/2026</a:t>
+              <a:t>2/17/2026</a:t>
             </a:fld>
             <a:endParaRPr lang="en-US"/>
           </a:p>
@@ -780,7 +787,7 @@
           <a:p>
             <a:fld id="{6E5A18B4-2029-423F-AF07-FF085EF6276F}" type="datetimeFigureOut">
               <a:rPr lang="en-US" smtClean="0"/>
-              <a:t>2/12/2026</a:t>
+              <a:t>2/17/2026</a:t>
             </a:fld>
             <a:endParaRPr lang="en-US"/>
           </a:p>
@@ -953,7 +960,7 @@
           <a:p>
             <a:fld id="{6E5A18B4-2029-423F-AF07-FF085EF6276F}" type="datetimeFigureOut">
               <a:rPr lang="en-US" smtClean="0"/>
-              <a:t>2/12/2026</a:t>
+              <a:t>2/17/2026</a:t>
             </a:fld>
             <a:endParaRPr lang="en-US"/>
           </a:p>
@@ -1116,7 +1123,7 @@
           <a:p>
             <a:fld id="{6E5A18B4-2029-423F-AF07-FF085EF6276F}" type="datetimeFigureOut">
               <a:rPr lang="en-US" smtClean="0"/>
-              <a:t>2/12/2026</a:t>
+              <a:t>2/17/2026</a:t>
             </a:fld>
             <a:endParaRPr lang="en-US"/>
           </a:p>
@@ -1356,7 +1363,7 @@
           <a:p>
             <a:fld id="{6E5A18B4-2029-423F-AF07-FF085EF6276F}" type="datetimeFigureOut">
               <a:rPr lang="en-US" smtClean="0"/>
-              <a:t>2/12/2026</a:t>
+              <a:t>2/17/2026</a:t>
             </a:fld>
             <a:endParaRPr lang="en-US"/>
           </a:p>
@@ -1580,7 +1587,7 @@
           <a:p>
             <a:fld id="{6E5A18B4-2029-423F-AF07-FF085EF6276F}" type="datetimeFigureOut">
               <a:rPr lang="en-US" smtClean="0"/>
-              <a:t>2/12/2026</a:t>
+              <a:t>2/17/2026</a:t>
             </a:fld>
             <a:endParaRPr lang="en-US"/>
           </a:p>
@@ -1939,7 +1946,7 @@
           <a:p>
             <a:fld id="{6E5A18B4-2029-423F-AF07-FF085EF6276F}" type="datetimeFigureOut">
               <a:rPr lang="en-US" smtClean="0"/>
-              <a:t>2/12/2026</a:t>
+              <a:t>2/17/2026</a:t>
             </a:fld>
             <a:endParaRPr lang="en-US"/>
           </a:p>
@@ -2051,7 +2058,7 @@
           <a:p>
             <a:fld id="{6E5A18B4-2029-423F-AF07-FF085EF6276F}" type="datetimeFigureOut">
               <a:rPr lang="en-US" smtClean="0"/>
-              <a:t>2/12/2026</a:t>
+              <a:t>2/17/2026</a:t>
             </a:fld>
             <a:endParaRPr lang="en-US"/>
           </a:p>
@@ -2141,7 +2148,7 @@
           <a:p>
             <a:fld id="{6E5A18B4-2029-423F-AF07-FF085EF6276F}" type="datetimeFigureOut">
               <a:rPr lang="en-US" smtClean="0"/>
-              <a:t>2/12/2026</a:t>
+              <a:t>2/17/2026</a:t>
             </a:fld>
             <a:endParaRPr lang="en-US"/>
           </a:p>
@@ -2411,7 +2418,7 @@
           <a:p>
             <a:fld id="{6E5A18B4-2029-423F-AF07-FF085EF6276F}" type="datetimeFigureOut">
               <a:rPr lang="en-US" smtClean="0"/>
-              <a:t>2/12/2026</a:t>
+              <a:t>2/17/2026</a:t>
             </a:fld>
             <a:endParaRPr lang="en-US"/>
           </a:p>
@@ -2658,7 +2665,7 @@
           <a:p>
             <a:fld id="{6E5A18B4-2029-423F-AF07-FF085EF6276F}" type="datetimeFigureOut">
               <a:rPr lang="en-US" smtClean="0"/>
-              <a:t>2/12/2026</a:t>
+              <a:t>2/17/2026</a:t>
             </a:fld>
             <a:endParaRPr lang="en-US"/>
           </a:p>
@@ -2864,7 +2871,7 @@
           <a:p>
             <a:fld id="{6E5A18B4-2029-423F-AF07-FF085EF6276F}" type="datetimeFigureOut">
               <a:rPr lang="en-US" smtClean="0"/>
-              <a:t>2/12/2026</a:t>
+              <a:t>2/17/2026</a:t>
             </a:fld>
             <a:endParaRPr lang="en-US"/>
           </a:p>
@@ -3395,1783 +3402,6 @@
         <p:spPr>
           <a:xfrm>
             <a:off x="838200" y="365125"/>
-            <a:ext cx="10515600" cy="983615"/>
-          </a:xfrm>
-        </p:spPr>
-        <p:txBody>
-          <a:bodyPr/>
-          <a:lstStyle/>
-          <a:p>
-            <a:r>
-              <a:rPr lang="en-US" altLang="en-US" b="1" dirty="0">
-                <a:solidFill>
-                  <a:schemeClr val="accent2">
-                    <a:lumMod val="75000"/>
-                  </a:schemeClr>
-                </a:solidFill>
-                <a:sym typeface="+mn-ea"/>
-              </a:rPr>
-              <a:t>Reverse of a String- Example</a:t>
-            </a:r>
-            <a:endParaRPr lang="en-US"/>
-          </a:p>
-        </p:txBody>
-      </p:sp>
-      <p:pic>
-        <p:nvPicPr>
-          <p:cNvPr id="4" name="Content Placeholder 3" descr="Image 01-02-2024 at 9.42 AM"/>
-          <p:cNvPicPr>
-            <a:picLocks noGrp="1" noChangeAspect="1"/>
-          </p:cNvPicPr>
-          <p:nvPr>
-            <p:ph idx="1"/>
-          </p:nvPr>
-        </p:nvPicPr>
-        <p:blipFill>
-          <a:blip r:embed="rId2"/>
-          <a:stretch>
-            <a:fillRect/>
-          </a:stretch>
-        </p:blipFill>
-        <p:spPr>
-          <a:xfrm>
-            <a:off x="2035810" y="1348740"/>
-            <a:ext cx="8046085" cy="5232400"/>
-          </a:xfrm>
-          <a:prstGeom prst="rect">
-            <a:avLst/>
-          </a:prstGeom>
-        </p:spPr>
-      </p:pic>
-    </p:spTree>
-  </p:cSld>
-  <p:clrMapOvr>
-    <a:masterClrMapping/>
-  </p:clrMapOvr>
-</p:sld>
-</file>
-
-<file path=ppt/slides/slide11.xml><?xml version="1.0" encoding="utf-8"?>
-<p:sld xmlns:a="http://schemas.openxmlformats.org/drawingml/2006/main" xmlns:r="http://schemas.openxmlformats.org/officeDocument/2006/relationships" xmlns:p="http://schemas.openxmlformats.org/presentationml/2006/main">
-  <p:cSld>
-    <p:spTree>
-      <p:nvGrpSpPr>
-        <p:cNvPr id="1" name=""/>
-        <p:cNvGrpSpPr/>
-        <p:nvPr/>
-      </p:nvGrpSpPr>
-      <p:grpSpPr>
-        <a:xfrm>
-          <a:off x="0" y="0"/>
-          <a:ext cx="0" cy="0"/>
-          <a:chOff x="0" y="0"/>
-          <a:chExt cx="0" cy="0"/>
-        </a:xfrm>
-      </p:grpSpPr>
-      <p:sp>
-        <p:nvSpPr>
-          <p:cNvPr id="2" name="Title 1"/>
-          <p:cNvSpPr>
-            <a:spLocks noGrp="1"/>
-          </p:cNvSpPr>
-          <p:nvPr>
-            <p:ph type="title"/>
-          </p:nvPr>
-        </p:nvSpPr>
-        <p:spPr>
-          <a:xfrm>
-            <a:off x="838200" y="380365"/>
-            <a:ext cx="10515600" cy="711200"/>
-          </a:xfrm>
-        </p:spPr>
-        <p:txBody>
-          <a:bodyPr>
-            <a:normAutofit fontScale="90000"/>
-          </a:bodyPr>
-          <a:lstStyle/>
-          <a:p>
-            <a:br>
-              <a:rPr lang="en-US" altLang="en-US" b="1" dirty="0">
-                <a:solidFill>
-                  <a:schemeClr val="accent2">
-                    <a:lumMod val="75000"/>
-                  </a:schemeClr>
-                </a:solidFill>
-                <a:sym typeface="+mn-ea"/>
-              </a:rPr>
-            </a:br>
-            <a:br>
-              <a:rPr lang="en-US" altLang="en-US" b="1" dirty="0">
-                <a:solidFill>
-                  <a:schemeClr val="accent2">
-                    <a:lumMod val="75000"/>
-                  </a:schemeClr>
-                </a:solidFill>
-                <a:sym typeface="+mn-ea"/>
-              </a:rPr>
-            </a:br>
-            <a:r>
-              <a:rPr lang="en-US" altLang="en-US" b="1" dirty="0">
-                <a:solidFill>
-                  <a:schemeClr val="accent2">
-                    <a:lumMod val="75000"/>
-                  </a:schemeClr>
-                </a:solidFill>
-                <a:sym typeface="+mn-ea"/>
-              </a:rPr>
-              <a:t>Theory of Formal Languages</a:t>
-            </a:r>
-            <a:br>
-              <a:rPr lang="en-US" altLang="en-US" b="1" dirty="0">
-                <a:solidFill>
-                  <a:schemeClr val="accent2">
-                    <a:lumMod val="75000"/>
-                  </a:schemeClr>
-                </a:solidFill>
-                <a:sym typeface="+mn-ea"/>
-              </a:rPr>
-            </a:br>
-            <a:br>
-              <a:rPr lang="en-US"/>
-            </a:br>
-            <a:endParaRPr lang="en-US"/>
-          </a:p>
-        </p:txBody>
-      </p:sp>
-      <p:pic>
-        <p:nvPicPr>
-          <p:cNvPr id="4" name="Content Placeholder 3" descr="Image 01-02-2024 at 9.17 AM"/>
-          <p:cNvPicPr>
-            <a:picLocks noGrp="1" noChangeAspect="1"/>
-          </p:cNvPicPr>
-          <p:nvPr>
-            <p:ph idx="1"/>
-          </p:nvPr>
-        </p:nvPicPr>
-        <p:blipFill>
-          <a:blip r:embed="rId2"/>
-          <a:stretch>
-            <a:fillRect/>
-          </a:stretch>
-        </p:blipFill>
-        <p:spPr>
-          <a:xfrm>
-            <a:off x="707390" y="1778635"/>
-            <a:ext cx="10515600" cy="1800225"/>
-          </a:xfrm>
-          <a:prstGeom prst="rect">
-            <a:avLst/>
-          </a:prstGeom>
-        </p:spPr>
-      </p:pic>
-    </p:spTree>
-  </p:cSld>
-  <p:clrMapOvr>
-    <a:masterClrMapping/>
-  </p:clrMapOvr>
-</p:sld>
-</file>
-
-<file path=ppt/slides/slide12.xml><?xml version="1.0" encoding="utf-8"?>
-<p:sld xmlns:a="http://schemas.openxmlformats.org/drawingml/2006/main" xmlns:r="http://schemas.openxmlformats.org/officeDocument/2006/relationships" xmlns:p="http://schemas.openxmlformats.org/presentationml/2006/main">
-  <p:cSld>
-    <p:spTree>
-      <p:nvGrpSpPr>
-        <p:cNvPr id="1" name=""/>
-        <p:cNvGrpSpPr/>
-        <p:nvPr/>
-      </p:nvGrpSpPr>
-      <p:grpSpPr>
-        <a:xfrm>
-          <a:off x="0" y="0"/>
-          <a:ext cx="0" cy="0"/>
-          <a:chOff x="0" y="0"/>
-          <a:chExt cx="0" cy="0"/>
-        </a:xfrm>
-      </p:grpSpPr>
-      <p:sp>
-        <p:nvSpPr>
-          <p:cNvPr id="2" name="Title 1"/>
-          <p:cNvSpPr>
-            <a:spLocks noGrp="1"/>
-          </p:cNvSpPr>
-          <p:nvPr>
-            <p:ph type="title"/>
-          </p:nvPr>
-        </p:nvSpPr>
-        <p:spPr>
-          <a:xfrm>
-            <a:off x="838200" y="365125"/>
-            <a:ext cx="10515600" cy="852805"/>
-          </a:xfrm>
-        </p:spPr>
-        <p:txBody>
-          <a:bodyPr>
-            <a:normAutofit fontScale="90000"/>
-          </a:bodyPr>
-          <a:lstStyle/>
-          <a:p>
-            <a:br>
-              <a:rPr lang="en-US" altLang="en-US" b="1" dirty="0">
-                <a:solidFill>
-                  <a:schemeClr val="accent2">
-                    <a:lumMod val="75000"/>
-                  </a:schemeClr>
-                </a:solidFill>
-                <a:sym typeface="+mn-ea"/>
-              </a:rPr>
-            </a:br>
-            <a:r>
-              <a:rPr lang="en-US" altLang="en-US" b="1" dirty="0">
-                <a:solidFill>
-                  <a:schemeClr val="accent2">
-                    <a:lumMod val="75000"/>
-                  </a:schemeClr>
-                </a:solidFill>
-                <a:sym typeface="+mn-ea"/>
-              </a:rPr>
-              <a:t>Cont...</a:t>
-            </a:r>
-            <a:br>
-              <a:rPr lang="en-US" altLang="en-US" b="1" dirty="0">
-                <a:solidFill>
-                  <a:schemeClr val="accent2">
-                    <a:lumMod val="75000"/>
-                  </a:schemeClr>
-                </a:solidFill>
-                <a:sym typeface="+mn-ea"/>
-              </a:rPr>
-            </a:br>
-            <a:endParaRPr lang="en-US"/>
-          </a:p>
-        </p:txBody>
-      </p:sp>
-      <p:pic>
-        <p:nvPicPr>
-          <p:cNvPr id="4" name="Content Placeholder 3" descr="Image 01-02-2024 at 9.22 AM"/>
-          <p:cNvPicPr>
-            <a:picLocks noGrp="1" noChangeAspect="1"/>
-          </p:cNvPicPr>
-          <p:nvPr>
-            <p:ph idx="1"/>
-          </p:nvPr>
-        </p:nvPicPr>
-        <p:blipFill>
-          <a:blip r:embed="rId2"/>
-          <a:stretch>
-            <a:fillRect/>
-          </a:stretch>
-        </p:blipFill>
-        <p:spPr>
-          <a:xfrm>
-            <a:off x="838200" y="1217930"/>
-            <a:ext cx="10515600" cy="4915535"/>
-          </a:xfrm>
-          <a:prstGeom prst="rect">
-            <a:avLst/>
-          </a:prstGeom>
-        </p:spPr>
-      </p:pic>
-    </p:spTree>
-  </p:cSld>
-  <p:clrMapOvr>
-    <a:masterClrMapping/>
-  </p:clrMapOvr>
-</p:sld>
-</file>
-
-<file path=ppt/slides/slide13.xml><?xml version="1.0" encoding="utf-8"?>
-<p:sld xmlns:a="http://schemas.openxmlformats.org/drawingml/2006/main" xmlns:r="http://schemas.openxmlformats.org/officeDocument/2006/relationships" xmlns:p="http://schemas.openxmlformats.org/presentationml/2006/main">
-  <p:cSld>
-    <p:spTree>
-      <p:nvGrpSpPr>
-        <p:cNvPr id="1" name=""/>
-        <p:cNvGrpSpPr/>
-        <p:nvPr/>
-      </p:nvGrpSpPr>
-      <p:grpSpPr>
-        <a:xfrm>
-          <a:off x="0" y="0"/>
-          <a:ext cx="0" cy="0"/>
-          <a:chOff x="0" y="0"/>
-          <a:chExt cx="0" cy="0"/>
-        </a:xfrm>
-      </p:grpSpPr>
-      <p:sp>
-        <p:nvSpPr>
-          <p:cNvPr id="2" name="Title 1"/>
-          <p:cNvSpPr>
-            <a:spLocks noGrp="1"/>
-          </p:cNvSpPr>
-          <p:nvPr>
-            <p:ph type="title"/>
-          </p:nvPr>
-        </p:nvSpPr>
-        <p:spPr>
-          <a:xfrm>
-            <a:off x="838200" y="365125"/>
-            <a:ext cx="10515600" cy="755015"/>
-          </a:xfrm>
-        </p:spPr>
-        <p:txBody>
-          <a:bodyPr>
-            <a:normAutofit fontScale="90000"/>
-          </a:bodyPr>
-          <a:lstStyle/>
-          <a:p>
-            <a:br>
-              <a:rPr lang="en-US" altLang="en-US" b="1" dirty="0">
-                <a:solidFill>
-                  <a:schemeClr val="accent2">
-                    <a:lumMod val="75000"/>
-                  </a:schemeClr>
-                </a:solidFill>
-                <a:sym typeface="+mn-ea"/>
-              </a:rPr>
-            </a:br>
-            <a:br>
-              <a:rPr lang="en-US" altLang="en-US" b="1" dirty="0">
-                <a:solidFill>
-                  <a:schemeClr val="accent2">
-                    <a:lumMod val="75000"/>
-                  </a:schemeClr>
-                </a:solidFill>
-                <a:sym typeface="+mn-ea"/>
-              </a:rPr>
-            </a:br>
-            <a:r>
-              <a:rPr lang="en-US" altLang="en-US" b="1" dirty="0">
-                <a:solidFill>
-                  <a:schemeClr val="accent2">
-                    <a:lumMod val="75000"/>
-                  </a:schemeClr>
-                </a:solidFill>
-                <a:sym typeface="+mn-ea"/>
-              </a:rPr>
-              <a:t>Concatenation</a:t>
-            </a:r>
-            <a:br>
-              <a:rPr lang="en-US" altLang="en-US" b="1" dirty="0">
-                <a:solidFill>
-                  <a:schemeClr val="accent2">
-                    <a:lumMod val="75000"/>
-                  </a:schemeClr>
-                </a:solidFill>
-                <a:sym typeface="+mn-ea"/>
-              </a:rPr>
-            </a:br>
-            <a:br>
-              <a:rPr lang="en-US"/>
-            </a:br>
-            <a:endParaRPr lang="en-US"/>
-          </a:p>
-        </p:txBody>
-      </p:sp>
-      <p:pic>
-        <p:nvPicPr>
-          <p:cNvPr id="4" name="Content Placeholder 3" descr="Image 01-02-2024 at 9.24 AM"/>
-          <p:cNvPicPr>
-            <a:picLocks noGrp="1" noChangeAspect="1"/>
-          </p:cNvPicPr>
-          <p:nvPr>
-            <p:ph idx="1"/>
-          </p:nvPr>
-        </p:nvPicPr>
-        <p:blipFill>
-          <a:blip r:embed="rId2"/>
-          <a:stretch>
-            <a:fillRect/>
-          </a:stretch>
-        </p:blipFill>
-        <p:spPr>
-          <a:xfrm>
-            <a:off x="838200" y="1572260"/>
-            <a:ext cx="10759440" cy="2423795"/>
-          </a:xfrm>
-          <a:prstGeom prst="rect">
-            <a:avLst/>
-          </a:prstGeom>
-        </p:spPr>
-      </p:pic>
-      <p:pic>
-        <p:nvPicPr>
-          <p:cNvPr id="5" name="Picture 4" descr="Image 01-02-2024 at 9.26 AM"/>
-          <p:cNvPicPr>
-            <a:picLocks noChangeAspect="1"/>
-          </p:cNvPicPr>
-          <p:nvPr/>
-        </p:nvPicPr>
-        <p:blipFill>
-          <a:blip r:embed="rId3"/>
-          <a:stretch>
-            <a:fillRect/>
-          </a:stretch>
-        </p:blipFill>
-        <p:spPr>
-          <a:xfrm>
-            <a:off x="1930400" y="4448175"/>
-            <a:ext cx="8331200" cy="1092200"/>
-          </a:xfrm>
-          <a:prstGeom prst="rect">
-            <a:avLst/>
-          </a:prstGeom>
-        </p:spPr>
-      </p:pic>
-    </p:spTree>
-  </p:cSld>
-  <p:clrMapOvr>
-    <a:masterClrMapping/>
-  </p:clrMapOvr>
-</p:sld>
-</file>
-
-<file path=ppt/slides/slide14.xml><?xml version="1.0" encoding="utf-8"?>
-<p:sld xmlns:a="http://schemas.openxmlformats.org/drawingml/2006/main" xmlns:r="http://schemas.openxmlformats.org/officeDocument/2006/relationships" xmlns:p="http://schemas.openxmlformats.org/presentationml/2006/main">
-  <p:cSld>
-    <p:spTree>
-      <p:nvGrpSpPr>
-        <p:cNvPr id="1" name=""/>
-        <p:cNvGrpSpPr/>
-        <p:nvPr/>
-      </p:nvGrpSpPr>
-      <p:grpSpPr>
-        <a:xfrm>
-          <a:off x="0" y="0"/>
-          <a:ext cx="0" cy="0"/>
-          <a:chOff x="0" y="0"/>
-          <a:chExt cx="0" cy="0"/>
-        </a:xfrm>
-      </p:grpSpPr>
-      <p:sp>
-        <p:nvSpPr>
-          <p:cNvPr id="2" name="Title 1"/>
-          <p:cNvSpPr>
-            <a:spLocks noGrp="1"/>
-          </p:cNvSpPr>
-          <p:nvPr>
-            <p:ph type="title"/>
-          </p:nvPr>
-        </p:nvSpPr>
-        <p:spPr>
-          <a:xfrm>
-            <a:off x="838200" y="365125"/>
-            <a:ext cx="10515600" cy="788035"/>
-          </a:xfrm>
-        </p:spPr>
-        <p:txBody>
-          <a:bodyPr>
-            <a:normAutofit fontScale="90000"/>
-          </a:bodyPr>
-          <a:lstStyle/>
-          <a:p>
-            <a:br>
-              <a:rPr lang="en-US" altLang="en-US" b="1" dirty="0">
-                <a:solidFill>
-                  <a:schemeClr val="accent2">
-                    <a:lumMod val="75000"/>
-                  </a:schemeClr>
-                </a:solidFill>
-                <a:sym typeface="+mn-ea"/>
-              </a:rPr>
-            </a:br>
-            <a:br>
-              <a:rPr lang="en-US" altLang="en-US" b="1" dirty="0">
-                <a:solidFill>
-                  <a:schemeClr val="accent2">
-                    <a:lumMod val="75000"/>
-                  </a:schemeClr>
-                </a:solidFill>
-                <a:sym typeface="+mn-ea"/>
-              </a:rPr>
-            </a:br>
-            <a:r>
-              <a:rPr lang="en-US" altLang="en-US" b="1" dirty="0">
-                <a:solidFill>
-                  <a:schemeClr val="accent2">
-                    <a:lumMod val="75000"/>
-                  </a:schemeClr>
-                </a:solidFill>
-                <a:sym typeface="+mn-ea"/>
-              </a:rPr>
-              <a:t>Cont...</a:t>
-            </a:r>
-            <a:br>
-              <a:rPr lang="en-US" altLang="en-US" b="1" dirty="0">
-                <a:solidFill>
-                  <a:schemeClr val="accent2">
-                    <a:lumMod val="75000"/>
-                  </a:schemeClr>
-                </a:solidFill>
-                <a:sym typeface="+mn-ea"/>
-              </a:rPr>
-            </a:br>
-            <a:br>
-              <a:rPr lang="en-US"/>
-            </a:br>
-            <a:endParaRPr lang="en-US"/>
-          </a:p>
-        </p:txBody>
-      </p:sp>
-      <p:pic>
-        <p:nvPicPr>
-          <p:cNvPr id="4" name="Content Placeholder 3" descr="Image 01-02-2024 at 9.27 AM"/>
-          <p:cNvPicPr>
-            <a:picLocks noGrp="1" noChangeAspect="1"/>
-          </p:cNvPicPr>
-          <p:nvPr>
-            <p:ph idx="1"/>
-          </p:nvPr>
-        </p:nvPicPr>
-        <p:blipFill>
-          <a:blip r:embed="rId2"/>
-          <a:stretch>
-            <a:fillRect/>
-          </a:stretch>
-        </p:blipFill>
-        <p:spPr>
-          <a:xfrm>
-            <a:off x="838200" y="1460500"/>
-            <a:ext cx="10515600" cy="2910840"/>
-          </a:xfrm>
-          <a:prstGeom prst="rect">
-            <a:avLst/>
-          </a:prstGeom>
-        </p:spPr>
-      </p:pic>
-    </p:spTree>
-  </p:cSld>
-  <p:clrMapOvr>
-    <a:masterClrMapping/>
-  </p:clrMapOvr>
-</p:sld>
-</file>
-
-<file path=ppt/slides/slide15.xml><?xml version="1.0" encoding="utf-8"?>
-<p:sld xmlns:a="http://schemas.openxmlformats.org/drawingml/2006/main" xmlns:r="http://schemas.openxmlformats.org/officeDocument/2006/relationships" xmlns:p="http://schemas.openxmlformats.org/presentationml/2006/main">
-  <p:cSld>
-    <p:spTree>
-      <p:nvGrpSpPr>
-        <p:cNvPr id="1" name=""/>
-        <p:cNvGrpSpPr/>
-        <p:nvPr/>
-      </p:nvGrpSpPr>
-      <p:grpSpPr>
-        <a:xfrm>
-          <a:off x="0" y="0"/>
-          <a:ext cx="0" cy="0"/>
-          <a:chOff x="0" y="0"/>
-          <a:chExt cx="0" cy="0"/>
-        </a:xfrm>
-      </p:grpSpPr>
-      <p:sp>
-        <p:nvSpPr>
-          <p:cNvPr id="2" name="Title 1"/>
-          <p:cNvSpPr>
-            <a:spLocks noGrp="1"/>
-          </p:cNvSpPr>
-          <p:nvPr>
-            <p:ph type="title"/>
-          </p:nvPr>
-        </p:nvSpPr>
-        <p:spPr>
-          <a:xfrm>
-            <a:off x="838200" y="365125"/>
-            <a:ext cx="10515600" cy="803275"/>
-          </a:xfrm>
-        </p:spPr>
-        <p:txBody>
-          <a:bodyPr>
-            <a:normAutofit/>
-          </a:bodyPr>
-          <a:lstStyle/>
-          <a:p>
-            <a:r>
-              <a:rPr lang="en-US" altLang="en-US" b="1" dirty="0">
-                <a:solidFill>
-                  <a:schemeClr val="accent2">
-                    <a:lumMod val="75000"/>
-                  </a:schemeClr>
-                </a:solidFill>
-                <a:sym typeface="+mn-ea"/>
-              </a:rPr>
-              <a:t>Cont...</a:t>
-            </a:r>
-            <a:endParaRPr lang="en-US"/>
-          </a:p>
-        </p:txBody>
-      </p:sp>
-      <p:pic>
-        <p:nvPicPr>
-          <p:cNvPr id="4" name="Content Placeholder 3" descr="Image 01-02-2024 at 9.34 AM"/>
-          <p:cNvPicPr>
-            <a:picLocks noGrp="1" noChangeAspect="1"/>
-          </p:cNvPicPr>
-          <p:nvPr>
-            <p:ph idx="1"/>
-          </p:nvPr>
-        </p:nvPicPr>
-        <p:blipFill>
-          <a:blip r:embed="rId2"/>
-          <a:stretch>
-            <a:fillRect/>
-          </a:stretch>
-        </p:blipFill>
-        <p:spPr>
-          <a:xfrm>
-            <a:off x="838200" y="1377315"/>
-            <a:ext cx="10515600" cy="4169410"/>
-          </a:xfrm>
-          <a:prstGeom prst="rect">
-            <a:avLst/>
-          </a:prstGeom>
-        </p:spPr>
-      </p:pic>
-    </p:spTree>
-  </p:cSld>
-  <p:clrMapOvr>
-    <a:masterClrMapping/>
-  </p:clrMapOvr>
-</p:sld>
-</file>
-
-<file path=ppt/slides/slide16.xml><?xml version="1.0" encoding="utf-8"?>
-<p:sld xmlns:a="http://schemas.openxmlformats.org/drawingml/2006/main" xmlns:r="http://schemas.openxmlformats.org/officeDocument/2006/relationships" xmlns:p="http://schemas.openxmlformats.org/presentationml/2006/main">
-  <p:cSld>
-    <p:spTree>
-      <p:nvGrpSpPr>
-        <p:cNvPr id="1" name=""/>
-        <p:cNvGrpSpPr/>
-        <p:nvPr/>
-      </p:nvGrpSpPr>
-      <p:grpSpPr>
-        <a:xfrm>
-          <a:off x="0" y="0"/>
-          <a:ext cx="0" cy="0"/>
-          <a:chOff x="0" y="0"/>
-          <a:chExt cx="0" cy="0"/>
-        </a:xfrm>
-      </p:grpSpPr>
-      <p:sp>
-        <p:nvSpPr>
-          <p:cNvPr id="2" name="Title 1"/>
-          <p:cNvSpPr>
-            <a:spLocks noGrp="1"/>
-          </p:cNvSpPr>
-          <p:nvPr>
-            <p:ph type="title"/>
-          </p:nvPr>
-        </p:nvSpPr>
-        <p:spPr>
-          <a:xfrm>
-            <a:off x="838200" y="365125"/>
-            <a:ext cx="10515600" cy="934720"/>
-          </a:xfrm>
-        </p:spPr>
-        <p:txBody>
-          <a:bodyPr/>
-          <a:lstStyle/>
-          <a:p>
-            <a:r>
-              <a:rPr lang="en-US" altLang="en-US" b="1" dirty="0">
-                <a:solidFill>
-                  <a:schemeClr val="accent2">
-                    <a:lumMod val="75000"/>
-                  </a:schemeClr>
-                </a:solidFill>
-                <a:sym typeface="+mn-ea"/>
-              </a:rPr>
-              <a:t>Cont...</a:t>
-            </a:r>
-            <a:endParaRPr lang="en-US"/>
-          </a:p>
-        </p:txBody>
-      </p:sp>
-      <p:pic>
-        <p:nvPicPr>
-          <p:cNvPr id="4" name="Content Placeholder 3" descr="Image 01-02-2024 at 9.36 AM"/>
-          <p:cNvPicPr>
-            <a:picLocks noGrp="1" noChangeAspect="1"/>
-          </p:cNvPicPr>
-          <p:nvPr>
-            <p:ph idx="1"/>
-          </p:nvPr>
-        </p:nvPicPr>
-        <p:blipFill>
-          <a:blip r:embed="rId2"/>
-          <a:stretch>
-            <a:fillRect/>
-          </a:stretch>
-        </p:blipFill>
-        <p:spPr>
-          <a:xfrm>
-            <a:off x="838200" y="1663700"/>
-            <a:ext cx="10515600" cy="4201795"/>
-          </a:xfrm>
-          <a:prstGeom prst="rect">
-            <a:avLst/>
-          </a:prstGeom>
-        </p:spPr>
-      </p:pic>
-    </p:spTree>
-  </p:cSld>
-  <p:clrMapOvr>
-    <a:masterClrMapping/>
-  </p:clrMapOvr>
-</p:sld>
-</file>
-
-<file path=ppt/slides/slide17.xml><?xml version="1.0" encoding="utf-8"?>
-<p:sld xmlns:a="http://schemas.openxmlformats.org/drawingml/2006/main" xmlns:r="http://schemas.openxmlformats.org/officeDocument/2006/relationships" xmlns:p="http://schemas.openxmlformats.org/presentationml/2006/main">
-  <p:cSld>
-    <p:spTree>
-      <p:nvGrpSpPr>
-        <p:cNvPr id="1" name=""/>
-        <p:cNvGrpSpPr/>
-        <p:nvPr/>
-      </p:nvGrpSpPr>
-      <p:grpSpPr>
-        <a:xfrm>
-          <a:off x="0" y="0"/>
-          <a:ext cx="0" cy="0"/>
-          <a:chOff x="0" y="0"/>
-          <a:chExt cx="0" cy="0"/>
-        </a:xfrm>
-      </p:grpSpPr>
-      <p:sp>
-        <p:nvSpPr>
-          <p:cNvPr id="2" name="Title 1"/>
-          <p:cNvSpPr>
-            <a:spLocks noGrp="1"/>
-          </p:cNvSpPr>
-          <p:nvPr>
-            <p:ph type="title"/>
-          </p:nvPr>
-        </p:nvSpPr>
-        <p:spPr>
-          <a:xfrm>
-            <a:off x="838200" y="365125"/>
-            <a:ext cx="10515600" cy="950595"/>
-          </a:xfrm>
-        </p:spPr>
-        <p:txBody>
-          <a:bodyPr>
-            <a:normAutofit fontScale="90000"/>
-          </a:bodyPr>
-          <a:lstStyle/>
-          <a:p>
-            <a:br>
-              <a:rPr lang="en-US" altLang="en-US" b="1" dirty="0">
-                <a:solidFill>
-                  <a:schemeClr val="accent2">
-                    <a:lumMod val="75000"/>
-                  </a:schemeClr>
-                </a:solidFill>
-              </a:rPr>
-            </a:br>
-            <a:r>
-              <a:rPr lang="en-US" altLang="en-US" b="1" dirty="0">
-                <a:solidFill>
-                  <a:schemeClr val="accent2">
-                    <a:lumMod val="75000"/>
-                  </a:schemeClr>
-                </a:solidFill>
-              </a:rPr>
-              <a:t>Palindrome</a:t>
-            </a:r>
-            <a:br>
-              <a:rPr lang="en-US" altLang="en-US" b="1" dirty="0">
-                <a:solidFill>
-                  <a:schemeClr val="accent2">
-                    <a:lumMod val="75000"/>
-                  </a:schemeClr>
-                </a:solidFill>
-              </a:rPr>
-            </a:br>
-            <a:endParaRPr lang="en-US"/>
-          </a:p>
-        </p:txBody>
-      </p:sp>
-      <p:pic>
-        <p:nvPicPr>
-          <p:cNvPr id="4" name="Content Placeholder 3" descr="Image 01-02-2024 at 9.47 AM"/>
-          <p:cNvPicPr>
-            <a:picLocks noGrp="1" noChangeAspect="1"/>
-          </p:cNvPicPr>
-          <p:nvPr>
-            <p:ph idx="1"/>
-          </p:nvPr>
-        </p:nvPicPr>
-        <p:blipFill>
-          <a:blip r:embed="rId2"/>
-          <a:stretch>
-            <a:fillRect/>
-          </a:stretch>
-        </p:blipFill>
-        <p:spPr>
-          <a:xfrm>
-            <a:off x="1550670" y="1205865"/>
-            <a:ext cx="9267825" cy="5395595"/>
-          </a:xfrm>
-          <a:prstGeom prst="rect">
-            <a:avLst/>
-          </a:prstGeom>
-        </p:spPr>
-      </p:pic>
-    </p:spTree>
-  </p:cSld>
-  <p:clrMapOvr>
-    <a:masterClrMapping/>
-  </p:clrMapOvr>
-</p:sld>
-</file>
-
-<file path=ppt/slides/slide18.xml><?xml version="1.0" encoding="utf-8"?>
-<p:sld xmlns:a="http://schemas.openxmlformats.org/drawingml/2006/main" xmlns:r="http://schemas.openxmlformats.org/officeDocument/2006/relationships" xmlns:p="http://schemas.openxmlformats.org/presentationml/2006/main">
-  <p:cSld>
-    <p:spTree>
-      <p:nvGrpSpPr>
-        <p:cNvPr id="1" name=""/>
-        <p:cNvGrpSpPr/>
-        <p:nvPr/>
-      </p:nvGrpSpPr>
-      <p:grpSpPr>
-        <a:xfrm>
-          <a:off x="0" y="0"/>
-          <a:ext cx="0" cy="0"/>
-          <a:chOff x="0" y="0"/>
-          <a:chExt cx="0" cy="0"/>
-        </a:xfrm>
-      </p:grpSpPr>
-      <p:sp>
-        <p:nvSpPr>
-          <p:cNvPr id="2" name="Title 1"/>
-          <p:cNvSpPr>
-            <a:spLocks noGrp="1"/>
-          </p:cNvSpPr>
-          <p:nvPr>
-            <p:ph type="title"/>
-          </p:nvPr>
-        </p:nvSpPr>
-        <p:spPr>
-          <a:xfrm>
-            <a:off x="838200" y="365125"/>
-            <a:ext cx="10515600" cy="819150"/>
-          </a:xfrm>
-        </p:spPr>
-        <p:txBody>
-          <a:bodyPr>
-            <a:normAutofit/>
-          </a:bodyPr>
-          <a:lstStyle/>
-          <a:p>
-            <a:r>
-              <a:rPr lang="en-US" altLang="en-US" b="1" dirty="0">
-                <a:solidFill>
-                  <a:schemeClr val="accent2">
-                    <a:lumMod val="75000"/>
-                  </a:schemeClr>
-                </a:solidFill>
-              </a:rPr>
-              <a:t>Kleene Star</a:t>
-            </a:r>
-          </a:p>
-        </p:txBody>
-      </p:sp>
-      <p:pic>
-        <p:nvPicPr>
-          <p:cNvPr id="4" name="Content Placeholder 3" descr="Image 01-02-2024 at 9.49 AM"/>
-          <p:cNvPicPr>
-            <a:picLocks noGrp="1" noChangeAspect="1"/>
-          </p:cNvPicPr>
-          <p:nvPr>
-            <p:ph idx="1"/>
-          </p:nvPr>
-        </p:nvPicPr>
-        <p:blipFill>
-          <a:blip r:embed="rId2"/>
-          <a:stretch>
-            <a:fillRect/>
-          </a:stretch>
-        </p:blipFill>
-        <p:spPr>
-          <a:xfrm>
-            <a:off x="838200" y="1451610"/>
-            <a:ext cx="10515600" cy="4593590"/>
-          </a:xfrm>
-          <a:prstGeom prst="rect">
-            <a:avLst/>
-          </a:prstGeom>
-        </p:spPr>
-      </p:pic>
-    </p:spTree>
-  </p:cSld>
-  <p:clrMapOvr>
-    <a:masterClrMapping/>
-  </p:clrMapOvr>
-</p:sld>
-</file>
-
-<file path=ppt/slides/slide19.xml><?xml version="1.0" encoding="utf-8"?>
-<p:sld xmlns:a="http://schemas.openxmlformats.org/drawingml/2006/main" xmlns:r="http://schemas.openxmlformats.org/officeDocument/2006/relationships" xmlns:p="http://schemas.openxmlformats.org/presentationml/2006/main">
-  <p:cSld>
-    <p:spTree>
-      <p:nvGrpSpPr>
-        <p:cNvPr id="1" name=""/>
-        <p:cNvGrpSpPr/>
-        <p:nvPr/>
-      </p:nvGrpSpPr>
-      <p:grpSpPr>
-        <a:xfrm>
-          <a:off x="0" y="0"/>
-          <a:ext cx="0" cy="0"/>
-          <a:chOff x="0" y="0"/>
-          <a:chExt cx="0" cy="0"/>
-        </a:xfrm>
-      </p:grpSpPr>
-      <p:sp>
-        <p:nvSpPr>
-          <p:cNvPr id="2" name="Title 1"/>
-          <p:cNvSpPr>
-            <a:spLocks noGrp="1"/>
-          </p:cNvSpPr>
-          <p:nvPr>
-            <p:ph type="title"/>
-          </p:nvPr>
-        </p:nvSpPr>
-        <p:spPr/>
-        <p:txBody>
-          <a:bodyPr/>
-          <a:lstStyle/>
-          <a:p>
-            <a:r>
-              <a:rPr lang="en-US" altLang="en-US" b="1" dirty="0">
-                <a:solidFill>
-                  <a:schemeClr val="accent2">
-                    <a:lumMod val="75000"/>
-                  </a:schemeClr>
-                </a:solidFill>
-                <a:sym typeface="+mn-ea"/>
-              </a:rPr>
-              <a:t>Kleene Star - Example</a:t>
-            </a:r>
-            <a:endParaRPr lang="en-US"/>
-          </a:p>
-        </p:txBody>
-      </p:sp>
-      <p:pic>
-        <p:nvPicPr>
-          <p:cNvPr id="4" name="Content Placeholder 3" descr="Image 01-02-2024 at 9.50 AM"/>
-          <p:cNvPicPr>
-            <a:picLocks noGrp="1" noChangeAspect="1"/>
-          </p:cNvPicPr>
-          <p:nvPr>
-            <p:ph idx="1"/>
-          </p:nvPr>
-        </p:nvPicPr>
-        <p:blipFill>
-          <a:blip r:embed="rId2"/>
-          <a:stretch>
-            <a:fillRect/>
-          </a:stretch>
-        </p:blipFill>
-        <p:spPr>
-          <a:xfrm>
-            <a:off x="1400175" y="1825625"/>
-            <a:ext cx="9391015" cy="4351655"/>
-          </a:xfrm>
-          <a:prstGeom prst="rect">
-            <a:avLst/>
-          </a:prstGeom>
-        </p:spPr>
-      </p:pic>
-    </p:spTree>
-  </p:cSld>
-  <p:clrMapOvr>
-    <a:masterClrMapping/>
-  </p:clrMapOvr>
-</p:sld>
-</file>
-
-<file path=ppt/slides/slide2.xml><?xml version="1.0" encoding="utf-8"?>
-<p:sld xmlns:a="http://schemas.openxmlformats.org/drawingml/2006/main" xmlns:r="http://schemas.openxmlformats.org/officeDocument/2006/relationships" xmlns:p="http://schemas.openxmlformats.org/presentationml/2006/main">
-  <p:cSld>
-    <p:spTree>
-      <p:nvGrpSpPr>
-        <p:cNvPr id="1" name=""/>
-        <p:cNvGrpSpPr/>
-        <p:nvPr/>
-      </p:nvGrpSpPr>
-      <p:grpSpPr>
-        <a:xfrm>
-          <a:off x="0" y="0"/>
-          <a:ext cx="0" cy="0"/>
-          <a:chOff x="0" y="0"/>
-          <a:chExt cx="0" cy="0"/>
-        </a:xfrm>
-      </p:grpSpPr>
-      <p:sp>
-        <p:nvSpPr>
-          <p:cNvPr id="2" name="Title 1"/>
-          <p:cNvSpPr>
-            <a:spLocks noGrp="1"/>
-          </p:cNvSpPr>
-          <p:nvPr>
-            <p:ph type="title"/>
-          </p:nvPr>
-        </p:nvSpPr>
-        <p:spPr>
-          <a:xfrm>
-            <a:off x="838200" y="536659"/>
-            <a:ext cx="10515600" cy="714626"/>
-          </a:xfrm>
-        </p:spPr>
-        <p:txBody>
-          <a:bodyPr/>
-          <a:lstStyle/>
-          <a:p>
-            <a:r>
-              <a:rPr lang="en-US" b="1" dirty="0">
-                <a:solidFill>
-                  <a:schemeClr val="accent2">
-                    <a:lumMod val="75000"/>
-                  </a:schemeClr>
-                </a:solidFill>
-              </a:rPr>
-              <a:t>Course Objective</a:t>
-            </a:r>
-            <a:endParaRPr lang="en-US" dirty="0">
-              <a:solidFill>
-                <a:schemeClr val="accent2">
-                  <a:lumMod val="75000"/>
-                </a:schemeClr>
-              </a:solidFill>
-            </a:endParaRPr>
-          </a:p>
-        </p:txBody>
-      </p:sp>
-      <p:sp>
-        <p:nvSpPr>
-          <p:cNvPr id="3" name="Content Placeholder 2"/>
-          <p:cNvSpPr>
-            <a:spLocks noGrp="1"/>
-          </p:cNvSpPr>
-          <p:nvPr>
-            <p:ph idx="1"/>
-          </p:nvPr>
-        </p:nvSpPr>
-        <p:spPr>
-          <a:xfrm>
-            <a:off x="838200" y="1435100"/>
-            <a:ext cx="10088245" cy="4886325"/>
-          </a:xfrm>
-        </p:spPr>
-        <p:txBody>
-          <a:bodyPr>
-            <a:normAutofit/>
-          </a:bodyPr>
-          <a:lstStyle/>
-          <a:p>
-            <a:pPr algn="just"/>
-            <a:r>
-              <a:rPr lang="en-US" dirty="0"/>
-              <a:t>To have a clear understanding of automata theory concepts.</a:t>
-            </a:r>
-          </a:p>
-          <a:p>
-            <a:pPr algn="just"/>
-            <a:r>
-              <a:rPr lang="en-US" dirty="0"/>
-              <a:t>To understand that regular and context free languages are useful models for many important kinds of hardware and software.</a:t>
-            </a:r>
-          </a:p>
-          <a:p>
-            <a:pPr algn="just"/>
-            <a:r>
-              <a:rPr lang="en-US" dirty="0"/>
-              <a:t>To be able to understand the use of regular and context free languages in solving problems such as lexical analysis, text processing etc.</a:t>
-            </a:r>
-          </a:p>
-        </p:txBody>
-      </p:sp>
-    </p:spTree>
-  </p:cSld>
-  <p:clrMapOvr>
-    <a:masterClrMapping/>
-  </p:clrMapOvr>
-</p:sld>
-</file>
-
-<file path=ppt/slides/slide20.xml><?xml version="1.0" encoding="utf-8"?>
-<p:sld xmlns:a="http://schemas.openxmlformats.org/drawingml/2006/main" xmlns:r="http://schemas.openxmlformats.org/officeDocument/2006/relationships" xmlns:p="http://schemas.openxmlformats.org/presentationml/2006/main">
-  <p:cSld>
-    <p:spTree>
-      <p:nvGrpSpPr>
-        <p:cNvPr id="1" name=""/>
-        <p:cNvGrpSpPr/>
-        <p:nvPr/>
-      </p:nvGrpSpPr>
-      <p:grpSpPr>
-        <a:xfrm>
-          <a:off x="0" y="0"/>
-          <a:ext cx="0" cy="0"/>
-          <a:chOff x="0" y="0"/>
-          <a:chExt cx="0" cy="0"/>
-        </a:xfrm>
-      </p:grpSpPr>
-      <p:sp>
-        <p:nvSpPr>
-          <p:cNvPr id="2" name="Title 1"/>
-          <p:cNvSpPr>
-            <a:spLocks noGrp="1"/>
-          </p:cNvSpPr>
-          <p:nvPr>
-            <p:ph type="title"/>
-          </p:nvPr>
-        </p:nvSpPr>
-        <p:spPr>
-          <a:xfrm>
-            <a:off x="838200" y="365125"/>
-            <a:ext cx="10515600" cy="934720"/>
-          </a:xfrm>
-        </p:spPr>
-        <p:txBody>
-          <a:bodyPr/>
-          <a:lstStyle/>
-          <a:p>
-            <a:r>
-              <a:rPr lang="en-US" altLang="en-US" b="1" dirty="0">
-                <a:solidFill>
-                  <a:schemeClr val="accent2">
-                    <a:lumMod val="75000"/>
-                  </a:schemeClr>
-                </a:solidFill>
-              </a:rPr>
-              <a:t>Cont...</a:t>
-            </a:r>
-          </a:p>
-        </p:txBody>
-      </p:sp>
-      <p:pic>
-        <p:nvPicPr>
-          <p:cNvPr id="4" name="Content Placeholder 3" descr="Image 01-02-2024 at 9.51 AM"/>
-          <p:cNvPicPr>
-            <a:picLocks noGrp="1" noChangeAspect="1"/>
-          </p:cNvPicPr>
-          <p:nvPr>
-            <p:ph idx="1"/>
-          </p:nvPr>
-        </p:nvPicPr>
-        <p:blipFill>
-          <a:blip r:embed="rId2"/>
-          <a:stretch>
-            <a:fillRect/>
-          </a:stretch>
-        </p:blipFill>
-        <p:spPr>
-          <a:xfrm>
-            <a:off x="838200" y="1702435"/>
-            <a:ext cx="10515600" cy="4071620"/>
-          </a:xfrm>
-          <a:prstGeom prst="rect">
-            <a:avLst/>
-          </a:prstGeom>
-        </p:spPr>
-      </p:pic>
-    </p:spTree>
-  </p:cSld>
-  <p:clrMapOvr>
-    <a:masterClrMapping/>
-  </p:clrMapOvr>
-</p:sld>
-</file>
-
-<file path=ppt/slides/slide21.xml><?xml version="1.0" encoding="utf-8"?>
-<p:sld xmlns:a="http://schemas.openxmlformats.org/drawingml/2006/main" xmlns:r="http://schemas.openxmlformats.org/officeDocument/2006/relationships" xmlns:p="http://schemas.openxmlformats.org/presentationml/2006/main">
-  <p:cSld>
-    <p:spTree>
-      <p:nvGrpSpPr>
-        <p:cNvPr id="1" name=""/>
-        <p:cNvGrpSpPr/>
-        <p:nvPr/>
-      </p:nvGrpSpPr>
-      <p:grpSpPr>
-        <a:xfrm>
-          <a:off x="0" y="0"/>
-          <a:ext cx="0" cy="0"/>
-          <a:chOff x="0" y="0"/>
-          <a:chExt cx="0" cy="0"/>
-        </a:xfrm>
-      </p:grpSpPr>
-      <p:pic>
-        <p:nvPicPr>
-          <p:cNvPr id="4" name="Content Placeholder 3" descr="Image 01-02-2024 at 9.53 AM"/>
-          <p:cNvPicPr>
-            <a:picLocks noGrp="1" noChangeAspect="1"/>
-          </p:cNvPicPr>
-          <p:nvPr>
-            <p:ph idx="1"/>
-          </p:nvPr>
-        </p:nvPicPr>
-        <p:blipFill>
-          <a:blip r:embed="rId2"/>
-          <a:stretch>
-            <a:fillRect/>
-          </a:stretch>
-        </p:blipFill>
-        <p:spPr>
-          <a:xfrm>
-            <a:off x="838200" y="2515870"/>
-            <a:ext cx="10515600" cy="1062990"/>
-          </a:xfrm>
-          <a:prstGeom prst="rect">
-            <a:avLst/>
-          </a:prstGeom>
-        </p:spPr>
-      </p:pic>
-    </p:spTree>
-  </p:cSld>
-  <p:clrMapOvr>
-    <a:masterClrMapping/>
-  </p:clrMapOvr>
-</p:sld>
-</file>
-
-<file path=ppt/slides/slide22.xml><?xml version="1.0" encoding="utf-8"?>
-<p:sld xmlns:a="http://schemas.openxmlformats.org/drawingml/2006/main" xmlns:r="http://schemas.openxmlformats.org/officeDocument/2006/relationships" xmlns:p="http://schemas.openxmlformats.org/presentationml/2006/main">
-  <p:cSld>
-    <p:spTree>
-      <p:nvGrpSpPr>
-        <p:cNvPr id="1" name=""/>
-        <p:cNvGrpSpPr/>
-        <p:nvPr/>
-      </p:nvGrpSpPr>
-      <p:grpSpPr>
-        <a:xfrm>
-          <a:off x="0" y="0"/>
-          <a:ext cx="0" cy="0"/>
-          <a:chOff x="0" y="0"/>
-          <a:chExt cx="0" cy="0"/>
-        </a:xfrm>
-      </p:grpSpPr>
-      <p:sp>
-        <p:nvSpPr>
-          <p:cNvPr id="2" name="Title 1"/>
-          <p:cNvSpPr>
-            <a:spLocks noGrp="1"/>
-          </p:cNvSpPr>
-          <p:nvPr>
-            <p:ph type="title"/>
-          </p:nvPr>
-        </p:nvSpPr>
-        <p:spPr>
-          <a:xfrm>
-            <a:off x="838200" y="365125"/>
-            <a:ext cx="10515600" cy="676275"/>
-          </a:xfrm>
-        </p:spPr>
-        <p:txBody>
-          <a:bodyPr>
-            <a:normAutofit fontScale="90000"/>
-          </a:bodyPr>
-          <a:lstStyle/>
-          <a:p>
-            <a:br>
-              <a:rPr lang="en-US" altLang="en-US" b="1" dirty="0">
-                <a:solidFill>
-                  <a:schemeClr val="accent2">
-                    <a:lumMod val="75000"/>
-                  </a:schemeClr>
-                </a:solidFill>
-                <a:sym typeface="+mn-ea"/>
-              </a:rPr>
-            </a:br>
-            <a:r>
-              <a:rPr lang="en-US" altLang="en-US" b="1" dirty="0">
-                <a:solidFill>
-                  <a:schemeClr val="accent2">
-                    <a:lumMod val="75000"/>
-                  </a:schemeClr>
-                </a:solidFill>
-                <a:sym typeface="+mn-ea"/>
-              </a:rPr>
-              <a:t>Cont...</a:t>
-            </a:r>
-            <a:br>
-              <a:rPr lang="en-US" altLang="en-US" b="1" dirty="0">
-                <a:solidFill>
-                  <a:schemeClr val="accent2">
-                    <a:lumMod val="75000"/>
-                  </a:schemeClr>
-                </a:solidFill>
-              </a:rPr>
-            </a:br>
-            <a:endParaRPr lang="en-US"/>
-          </a:p>
-        </p:txBody>
-      </p:sp>
-      <p:pic>
-        <p:nvPicPr>
-          <p:cNvPr id="4" name="Content Placeholder 3" descr="Image 01-02-2024 at 9.55 AM"/>
-          <p:cNvPicPr>
-            <a:picLocks noGrp="1" noChangeAspect="1"/>
-          </p:cNvPicPr>
-          <p:nvPr>
-            <p:ph idx="1"/>
-          </p:nvPr>
-        </p:nvPicPr>
-        <p:blipFill>
-          <a:blip r:embed="rId2"/>
-          <a:stretch>
-            <a:fillRect/>
-          </a:stretch>
-        </p:blipFill>
-        <p:spPr>
-          <a:xfrm>
-            <a:off x="2283460" y="1248410"/>
-            <a:ext cx="7972425" cy="5405755"/>
-          </a:xfrm>
-          <a:prstGeom prst="rect">
-            <a:avLst/>
-          </a:prstGeom>
-        </p:spPr>
-      </p:pic>
-    </p:spTree>
-  </p:cSld>
-  <p:clrMapOvr>
-    <a:masterClrMapping/>
-  </p:clrMapOvr>
-</p:sld>
-</file>
-
-<file path=ppt/slides/slide23.xml><?xml version="1.0" encoding="utf-8"?>
-<p:sld xmlns:a="http://schemas.openxmlformats.org/drawingml/2006/main" xmlns:r="http://schemas.openxmlformats.org/officeDocument/2006/relationships" xmlns:p="http://schemas.openxmlformats.org/presentationml/2006/main">
-  <p:cSld>
-    <p:spTree>
-      <p:nvGrpSpPr>
-        <p:cNvPr id="1" name=""/>
-        <p:cNvGrpSpPr/>
-        <p:nvPr/>
-      </p:nvGrpSpPr>
-      <p:grpSpPr>
-        <a:xfrm>
-          <a:off x="0" y="0"/>
-          <a:ext cx="0" cy="0"/>
-          <a:chOff x="0" y="0"/>
-          <a:chExt cx="0" cy="0"/>
-        </a:xfrm>
-      </p:grpSpPr>
-      <p:sp>
-        <p:nvSpPr>
-          <p:cNvPr id="2" name="Title 1"/>
-          <p:cNvSpPr>
-            <a:spLocks noGrp="1"/>
-          </p:cNvSpPr>
-          <p:nvPr>
-            <p:ph type="title"/>
-          </p:nvPr>
-        </p:nvSpPr>
-        <p:spPr>
-          <a:xfrm>
-            <a:off x="838200" y="365125"/>
-            <a:ext cx="10515600" cy="734695"/>
-          </a:xfrm>
-        </p:spPr>
-        <p:txBody>
-          <a:bodyPr>
-            <a:normAutofit fontScale="90000"/>
-          </a:bodyPr>
-          <a:lstStyle/>
-          <a:p>
-            <a:br>
-              <a:rPr lang="en-US" altLang="en-US" b="1" dirty="0">
-                <a:solidFill>
-                  <a:schemeClr val="accent2">
-                    <a:lumMod val="75000"/>
-                  </a:schemeClr>
-                </a:solidFill>
-                <a:sym typeface="+mn-ea"/>
-              </a:rPr>
-            </a:br>
-            <a:r>
-              <a:rPr lang="en-US" altLang="en-US" b="1" dirty="0">
-                <a:solidFill>
-                  <a:schemeClr val="accent2">
-                    <a:lumMod val="75000"/>
-                  </a:schemeClr>
-                </a:solidFill>
-                <a:sym typeface="+mn-ea"/>
-              </a:rPr>
-              <a:t>Example 2</a:t>
-            </a:r>
-            <a:br>
-              <a:rPr lang="en-US" altLang="en-US" b="1" dirty="0">
-                <a:solidFill>
-                  <a:schemeClr val="accent2">
-                    <a:lumMod val="75000"/>
-                  </a:schemeClr>
-                </a:solidFill>
-                <a:sym typeface="+mn-ea"/>
-              </a:rPr>
-            </a:br>
-            <a:endParaRPr lang="en-US"/>
-          </a:p>
-        </p:txBody>
-      </p:sp>
-      <p:pic>
-        <p:nvPicPr>
-          <p:cNvPr id="4" name="Content Placeholder 3" descr="Image 01-02-2024 at 9.57 AM"/>
-          <p:cNvPicPr>
-            <a:picLocks noGrp="1" noChangeAspect="1"/>
-          </p:cNvPicPr>
-          <p:nvPr>
-            <p:ph idx="1"/>
-          </p:nvPr>
-        </p:nvPicPr>
-        <p:blipFill>
-          <a:blip r:embed="rId2"/>
-          <a:stretch>
-            <a:fillRect/>
-          </a:stretch>
-        </p:blipFill>
-        <p:spPr>
-          <a:xfrm>
-            <a:off x="1597025" y="1273175"/>
-            <a:ext cx="8808720" cy="5279390"/>
-          </a:xfrm>
-          <a:prstGeom prst="rect">
-            <a:avLst/>
-          </a:prstGeom>
-        </p:spPr>
-      </p:pic>
-    </p:spTree>
-  </p:cSld>
-  <p:clrMapOvr>
-    <a:masterClrMapping/>
-  </p:clrMapOvr>
-</p:sld>
-</file>
-
-<file path=ppt/slides/slide24.xml><?xml version="1.0" encoding="utf-8"?>
-<p:sld xmlns:a="http://schemas.openxmlformats.org/drawingml/2006/main" xmlns:r="http://schemas.openxmlformats.org/officeDocument/2006/relationships" xmlns:p="http://schemas.openxmlformats.org/presentationml/2006/main">
-  <p:cSld>
-    <p:spTree>
-      <p:nvGrpSpPr>
-        <p:cNvPr id="1" name=""/>
-        <p:cNvGrpSpPr/>
-        <p:nvPr/>
-      </p:nvGrpSpPr>
-      <p:grpSpPr>
-        <a:xfrm>
-          <a:off x="0" y="0"/>
-          <a:ext cx="0" cy="0"/>
-          <a:chOff x="0" y="0"/>
-          <a:chExt cx="0" cy="0"/>
-        </a:xfrm>
-      </p:grpSpPr>
-      <p:sp>
-        <p:nvSpPr>
-          <p:cNvPr id="3" name="Content Placeholder 2"/>
-          <p:cNvSpPr>
-            <a:spLocks noGrp="1"/>
-          </p:cNvSpPr>
-          <p:nvPr>
-            <p:ph idx="1"/>
-          </p:nvPr>
-        </p:nvSpPr>
-        <p:spPr>
-          <a:xfrm>
-            <a:off x="3728085" y="2772410"/>
-            <a:ext cx="5715635" cy="793115"/>
-          </a:xfrm>
-        </p:spPr>
-        <p:txBody>
-          <a:bodyPr/>
-          <a:lstStyle/>
-          <a:p>
-            <a:pPr marL="0" indent="0" algn="ctr">
-              <a:buNone/>
-            </a:pPr>
-            <a:r>
-              <a:rPr lang="en-US" sz="3600" b="1"/>
-              <a:t>End of Lecture</a:t>
-            </a:r>
-          </a:p>
-        </p:txBody>
-      </p:sp>
-    </p:spTree>
-  </p:cSld>
-  <p:clrMapOvr>
-    <a:masterClrMapping/>
-  </p:clrMapOvr>
-</p:sld>
-</file>
-
-<file path=ppt/slides/slide3.xml><?xml version="1.0" encoding="utf-8"?>
-<p:sld xmlns:a="http://schemas.openxmlformats.org/drawingml/2006/main" xmlns:r="http://schemas.openxmlformats.org/officeDocument/2006/relationships" xmlns:p="http://schemas.openxmlformats.org/presentationml/2006/main">
-  <p:cSld>
-    <p:spTree>
-      <p:nvGrpSpPr>
-        <p:cNvPr id="1" name=""/>
-        <p:cNvGrpSpPr/>
-        <p:nvPr/>
-      </p:nvGrpSpPr>
-      <p:grpSpPr>
-        <a:xfrm>
-          <a:off x="0" y="0"/>
-          <a:ext cx="0" cy="0"/>
-          <a:chOff x="0" y="0"/>
-          <a:chExt cx="0" cy="0"/>
-        </a:xfrm>
-      </p:grpSpPr>
-      <p:sp>
-        <p:nvSpPr>
-          <p:cNvPr id="2" name="Title 1"/>
-          <p:cNvSpPr>
-            <a:spLocks noGrp="1"/>
-          </p:cNvSpPr>
-          <p:nvPr>
-            <p:ph type="ctrTitle"/>
-          </p:nvPr>
-        </p:nvSpPr>
-        <p:spPr/>
-        <p:txBody>
-          <a:bodyPr>
-            <a:normAutofit/>
-          </a:bodyPr>
-          <a:lstStyle/>
-          <a:p>
-            <a:r>
-              <a:rPr lang="en-US" dirty="0"/>
-              <a:t> </a:t>
-            </a:r>
-            <a:r>
-              <a:rPr lang="en-US" dirty="0">
-                <a:sym typeface="+mn-ea"/>
-              </a:rPr>
-              <a:t>Theory of Automata</a:t>
-            </a:r>
-            <a:r>
-              <a:rPr lang="en-US" dirty="0"/>
-              <a:t> Course</a:t>
-            </a:r>
-          </a:p>
-        </p:txBody>
-      </p:sp>
-      <p:sp>
-        <p:nvSpPr>
-          <p:cNvPr id="3" name="Subtitle 2"/>
-          <p:cNvSpPr>
-            <a:spLocks noGrp="1"/>
-          </p:cNvSpPr>
-          <p:nvPr>
-            <p:ph type="subTitle" idx="1"/>
-          </p:nvPr>
-        </p:nvSpPr>
-        <p:spPr/>
-        <p:txBody>
-          <a:bodyPr/>
-          <a:lstStyle/>
-          <a:p>
-            <a:r>
-              <a:rPr lang="en-US" dirty="0"/>
-              <a:t>Lecture 2</a:t>
-            </a:r>
-          </a:p>
-        </p:txBody>
-      </p:sp>
-    </p:spTree>
-  </p:cSld>
-  <p:clrMapOvr>
-    <a:masterClrMapping/>
-  </p:clrMapOvr>
-</p:sld>
-</file>
-
-<file path=ppt/slides/slide4.xml><?xml version="1.0" encoding="utf-8"?>
-<p:sld xmlns:a="http://schemas.openxmlformats.org/drawingml/2006/main" xmlns:r="http://schemas.openxmlformats.org/officeDocument/2006/relationships" xmlns:p="http://schemas.openxmlformats.org/presentationml/2006/main">
-  <p:cSld>
-    <p:spTree>
-      <p:nvGrpSpPr>
-        <p:cNvPr id="1" name=""/>
-        <p:cNvGrpSpPr/>
-        <p:nvPr/>
-      </p:nvGrpSpPr>
-      <p:grpSpPr>
-        <a:xfrm>
-          <a:off x="0" y="0"/>
-          <a:ext cx="0" cy="0"/>
-          <a:chOff x="0" y="0"/>
-          <a:chExt cx="0" cy="0"/>
-        </a:xfrm>
-      </p:grpSpPr>
-      <p:sp>
-        <p:nvSpPr>
-          <p:cNvPr id="3" name="Content Placeholder 2"/>
-          <p:cNvSpPr>
-            <a:spLocks noGrp="1"/>
-          </p:cNvSpPr>
-          <p:nvPr>
-            <p:ph idx="1"/>
-          </p:nvPr>
-        </p:nvSpPr>
-        <p:spPr>
-          <a:xfrm>
-            <a:off x="838200" y="2039815"/>
-            <a:ext cx="10515600" cy="3376247"/>
-          </a:xfrm>
-        </p:spPr>
-        <p:txBody>
-          <a:bodyPr/>
-          <a:lstStyle/>
-          <a:p>
-            <a:pPr marL="0" indent="0" algn="ctr">
-              <a:buNone/>
-            </a:pPr>
-            <a:r>
-              <a:rPr lang="en-US" sz="5400" dirty="0">
-                <a:latin typeface="Algerian" panose="04020705040A02060702" pitchFamily="82" charset="0"/>
-              </a:rPr>
-              <a:t>CHAPTER 2 - Languages</a:t>
-            </a:r>
-          </a:p>
-          <a:p>
-            <a:pPr marL="0" indent="0" algn="ctr">
-              <a:buNone/>
-            </a:pPr>
-            <a:r>
-              <a:rPr lang="en-US" sz="3200"/>
-              <a:t>Overview</a:t>
-            </a:r>
-            <a:endParaRPr lang="en-US" sz="3200" dirty="0"/>
-          </a:p>
-        </p:txBody>
-      </p:sp>
-    </p:spTree>
-  </p:cSld>
-  <p:clrMapOvr>
-    <a:masterClrMapping/>
-  </p:clrMapOvr>
-</p:sld>
-</file>
-
-<file path=ppt/slides/slide5.xml><?xml version="1.0" encoding="utf-8"?>
-<p:sld xmlns:a="http://schemas.openxmlformats.org/drawingml/2006/main" xmlns:r="http://schemas.openxmlformats.org/officeDocument/2006/relationships" xmlns:p="http://schemas.openxmlformats.org/presentationml/2006/main">
-  <p:cSld>
-    <p:spTree>
-      <p:nvGrpSpPr>
-        <p:cNvPr id="1" name=""/>
-        <p:cNvGrpSpPr/>
-        <p:nvPr/>
-      </p:nvGrpSpPr>
-      <p:grpSpPr>
-        <a:xfrm>
-          <a:off x="0" y="0"/>
-          <a:ext cx="0" cy="0"/>
-          <a:chOff x="0" y="0"/>
-          <a:chExt cx="0" cy="0"/>
-        </a:xfrm>
-      </p:grpSpPr>
-      <p:sp>
-        <p:nvSpPr>
-          <p:cNvPr id="2" name="Title 1"/>
-          <p:cNvSpPr>
-            <a:spLocks noGrp="1"/>
-          </p:cNvSpPr>
-          <p:nvPr>
-            <p:ph type="title"/>
-          </p:nvPr>
-        </p:nvSpPr>
-        <p:spPr>
-          <a:xfrm>
-            <a:off x="838200" y="641985"/>
-            <a:ext cx="10515600" cy="527050"/>
-          </a:xfrm>
-        </p:spPr>
-        <p:txBody>
-          <a:bodyPr>
-            <a:normAutofit fontScale="90000"/>
-          </a:bodyPr>
-          <a:lstStyle/>
-          <a:p>
-            <a:r>
-              <a:rPr lang="en-US" altLang="en-US" b="1" dirty="0">
-                <a:solidFill>
-                  <a:schemeClr val="accent2">
-                    <a:lumMod val="75000"/>
-                  </a:schemeClr>
-                </a:solidFill>
-                <a:sym typeface="+mn-ea"/>
-              </a:rPr>
-              <a:t>Language</a:t>
-            </a:r>
-            <a:endParaRPr lang="en-US"/>
-          </a:p>
-        </p:txBody>
-      </p:sp>
-      <p:pic>
-        <p:nvPicPr>
-          <p:cNvPr id="4" name="Content Placeholder 3" descr="Image 29-01-2024 at 11.29 PM"/>
-          <p:cNvPicPr>
-            <a:picLocks noGrp="1" noChangeAspect="1"/>
-          </p:cNvPicPr>
-          <p:nvPr>
-            <p:ph idx="1"/>
-          </p:nvPr>
-        </p:nvPicPr>
-        <p:blipFill>
-          <a:blip r:embed="rId2"/>
-          <a:stretch>
-            <a:fillRect/>
-          </a:stretch>
-        </p:blipFill>
-        <p:spPr>
-          <a:xfrm>
-            <a:off x="838200" y="1777365"/>
-            <a:ext cx="10678795" cy="2831465"/>
-          </a:xfrm>
-          <a:prstGeom prst="rect">
-            <a:avLst/>
-          </a:prstGeom>
-        </p:spPr>
-      </p:pic>
-    </p:spTree>
-  </p:cSld>
-  <p:clrMapOvr>
-    <a:masterClrMapping/>
-  </p:clrMapOvr>
-</p:sld>
-</file>
-
-<file path=ppt/slides/slide6.xml><?xml version="1.0" encoding="utf-8"?>
-<p:sld xmlns:a="http://schemas.openxmlformats.org/drawingml/2006/main" xmlns:r="http://schemas.openxmlformats.org/officeDocument/2006/relationships" xmlns:p="http://schemas.openxmlformats.org/presentationml/2006/main">
-  <p:cSld>
-    <p:spTree>
-      <p:nvGrpSpPr>
-        <p:cNvPr id="1" name=""/>
-        <p:cNvGrpSpPr/>
-        <p:nvPr/>
-      </p:nvGrpSpPr>
-      <p:grpSpPr>
-        <a:xfrm>
-          <a:off x="0" y="0"/>
-          <a:ext cx="0" cy="0"/>
-          <a:chOff x="0" y="0"/>
-          <a:chExt cx="0" cy="0"/>
-        </a:xfrm>
-      </p:grpSpPr>
-      <p:sp>
-        <p:nvSpPr>
-          <p:cNvPr id="2" name="Title 1"/>
-          <p:cNvSpPr>
-            <a:spLocks noGrp="1"/>
-          </p:cNvSpPr>
-          <p:nvPr>
-            <p:ph type="title"/>
-          </p:nvPr>
-        </p:nvSpPr>
-        <p:spPr>
-          <a:xfrm>
-            <a:off x="838200" y="365125"/>
             <a:ext cx="10515600" cy="739140"/>
           </a:xfrm>
         </p:spPr>
@@ -5278,7 +3508,7 @@
 </p:sld>
 </file>
 
-<file path=ppt/slides/slide7.xml><?xml version="1.0" encoding="utf-8"?>
+<file path=ppt/slides/slide11.xml><?xml version="1.0" encoding="utf-8"?>
 <p:sld xmlns:a="http://schemas.openxmlformats.org/drawingml/2006/main" xmlns:r="http://schemas.openxmlformats.org/officeDocument/2006/relationships" xmlns:p="http://schemas.openxmlformats.org/presentationml/2006/main">
   <p:cSld>
     <p:spTree>
@@ -5364,7 +3594,7 @@
 </p:sld>
 </file>
 
-<file path=ppt/slides/slide8.xml><?xml version="1.0" encoding="utf-8"?>
+<file path=ppt/slides/slide12.xml><?xml version="1.0" encoding="utf-8"?>
 <p:sld xmlns:a="http://schemas.openxmlformats.org/drawingml/2006/main" xmlns:r="http://schemas.openxmlformats.org/officeDocument/2006/relationships" xmlns:p="http://schemas.openxmlformats.org/presentationml/2006/main">
   <p:cSld>
     <p:spTree>
@@ -5501,7 +3731,7 @@
 </p:sld>
 </file>
 
-<file path=ppt/slides/slide9.xml><?xml version="1.0" encoding="utf-8"?>
+<file path=ppt/slides/slide13.xml><?xml version="1.0" encoding="utf-8"?>
 <p:sld xmlns:a="http://schemas.openxmlformats.org/drawingml/2006/main" xmlns:r="http://schemas.openxmlformats.org/officeDocument/2006/relationships" xmlns:p="http://schemas.openxmlformats.org/presentationml/2006/main">
   <p:cSld>
     <p:spTree>
@@ -5578,6 +3808,3313 @@
         </p:spPr>
       </p:pic>
     </p:spTree>
+  </p:cSld>
+  <p:clrMapOvr>
+    <a:masterClrMapping/>
+  </p:clrMapOvr>
+</p:sld>
+</file>
+
+<file path=ppt/slides/slide14.xml><?xml version="1.0" encoding="utf-8"?>
+<p:sld xmlns:a="http://schemas.openxmlformats.org/drawingml/2006/main" xmlns:r="http://schemas.openxmlformats.org/officeDocument/2006/relationships" xmlns:p="http://schemas.openxmlformats.org/presentationml/2006/main">
+  <p:cSld>
+    <p:spTree>
+      <p:nvGrpSpPr>
+        <p:cNvPr id="1" name=""/>
+        <p:cNvGrpSpPr/>
+        <p:nvPr/>
+      </p:nvGrpSpPr>
+      <p:grpSpPr>
+        <a:xfrm>
+          <a:off x="0" y="0"/>
+          <a:ext cx="0" cy="0"/>
+          <a:chOff x="0" y="0"/>
+          <a:chExt cx="0" cy="0"/>
+        </a:xfrm>
+      </p:grpSpPr>
+      <p:sp>
+        <p:nvSpPr>
+          <p:cNvPr id="2" name="Title 1"/>
+          <p:cNvSpPr>
+            <a:spLocks noGrp="1"/>
+          </p:cNvSpPr>
+          <p:nvPr>
+            <p:ph type="title"/>
+          </p:nvPr>
+        </p:nvSpPr>
+        <p:spPr>
+          <a:xfrm>
+            <a:off x="838200" y="365125"/>
+            <a:ext cx="10515600" cy="983615"/>
+          </a:xfrm>
+        </p:spPr>
+        <p:txBody>
+          <a:bodyPr/>
+          <a:lstStyle/>
+          <a:p>
+            <a:r>
+              <a:rPr lang="en-US" altLang="en-US" b="1" dirty="0">
+                <a:solidFill>
+                  <a:schemeClr val="accent2">
+                    <a:lumMod val="75000"/>
+                  </a:schemeClr>
+                </a:solidFill>
+                <a:sym typeface="+mn-ea"/>
+              </a:rPr>
+              <a:t>Reverse of a String- Example</a:t>
+            </a:r>
+            <a:endParaRPr lang="en-US"/>
+          </a:p>
+        </p:txBody>
+      </p:sp>
+      <p:pic>
+        <p:nvPicPr>
+          <p:cNvPr id="4" name="Content Placeholder 3" descr="Image 01-02-2024 at 9.42 AM"/>
+          <p:cNvPicPr>
+            <a:picLocks noGrp="1" noChangeAspect="1"/>
+          </p:cNvPicPr>
+          <p:nvPr>
+            <p:ph idx="1"/>
+          </p:nvPr>
+        </p:nvPicPr>
+        <p:blipFill>
+          <a:blip r:embed="rId2"/>
+          <a:stretch>
+            <a:fillRect/>
+          </a:stretch>
+        </p:blipFill>
+        <p:spPr>
+          <a:xfrm>
+            <a:off x="2035810" y="1348740"/>
+            <a:ext cx="8046085" cy="5232400"/>
+          </a:xfrm>
+          <a:prstGeom prst="rect">
+            <a:avLst/>
+          </a:prstGeom>
+        </p:spPr>
+      </p:pic>
+    </p:spTree>
+  </p:cSld>
+  <p:clrMapOvr>
+    <a:masterClrMapping/>
+  </p:clrMapOvr>
+</p:sld>
+</file>
+
+<file path=ppt/slides/slide15.xml><?xml version="1.0" encoding="utf-8"?>
+<p:sld xmlns:a="http://schemas.openxmlformats.org/drawingml/2006/main" xmlns:r="http://schemas.openxmlformats.org/officeDocument/2006/relationships" xmlns:p="http://schemas.openxmlformats.org/presentationml/2006/main">
+  <p:cSld>
+    <p:spTree>
+      <p:nvGrpSpPr>
+        <p:cNvPr id="1" name=""/>
+        <p:cNvGrpSpPr/>
+        <p:nvPr/>
+      </p:nvGrpSpPr>
+      <p:grpSpPr>
+        <a:xfrm>
+          <a:off x="0" y="0"/>
+          <a:ext cx="0" cy="0"/>
+          <a:chOff x="0" y="0"/>
+          <a:chExt cx="0" cy="0"/>
+        </a:xfrm>
+      </p:grpSpPr>
+      <p:sp>
+        <p:nvSpPr>
+          <p:cNvPr id="2" name="Title 1"/>
+          <p:cNvSpPr>
+            <a:spLocks noGrp="1"/>
+          </p:cNvSpPr>
+          <p:nvPr>
+            <p:ph type="title"/>
+          </p:nvPr>
+        </p:nvSpPr>
+        <p:spPr>
+          <a:xfrm>
+            <a:off x="838200" y="380365"/>
+            <a:ext cx="10515600" cy="711200"/>
+          </a:xfrm>
+        </p:spPr>
+        <p:txBody>
+          <a:bodyPr>
+            <a:normAutofit fontScale="90000"/>
+          </a:bodyPr>
+          <a:lstStyle/>
+          <a:p>
+            <a:br>
+              <a:rPr lang="en-US" altLang="en-US" b="1" dirty="0">
+                <a:solidFill>
+                  <a:schemeClr val="accent2">
+                    <a:lumMod val="75000"/>
+                  </a:schemeClr>
+                </a:solidFill>
+                <a:sym typeface="+mn-ea"/>
+              </a:rPr>
+            </a:br>
+            <a:br>
+              <a:rPr lang="en-US" altLang="en-US" b="1" dirty="0">
+                <a:solidFill>
+                  <a:schemeClr val="accent2">
+                    <a:lumMod val="75000"/>
+                  </a:schemeClr>
+                </a:solidFill>
+                <a:sym typeface="+mn-ea"/>
+              </a:rPr>
+            </a:br>
+            <a:r>
+              <a:rPr lang="en-US" altLang="en-US" b="1" dirty="0">
+                <a:solidFill>
+                  <a:schemeClr val="accent2">
+                    <a:lumMod val="75000"/>
+                  </a:schemeClr>
+                </a:solidFill>
+                <a:sym typeface="+mn-ea"/>
+              </a:rPr>
+              <a:t>Theory of Formal Languages</a:t>
+            </a:r>
+            <a:br>
+              <a:rPr lang="en-US" altLang="en-US" b="1" dirty="0">
+                <a:solidFill>
+                  <a:schemeClr val="accent2">
+                    <a:lumMod val="75000"/>
+                  </a:schemeClr>
+                </a:solidFill>
+                <a:sym typeface="+mn-ea"/>
+              </a:rPr>
+            </a:br>
+            <a:br>
+              <a:rPr lang="en-US"/>
+            </a:br>
+            <a:endParaRPr lang="en-US"/>
+          </a:p>
+        </p:txBody>
+      </p:sp>
+      <p:pic>
+        <p:nvPicPr>
+          <p:cNvPr id="4" name="Content Placeholder 3" descr="Image 01-02-2024 at 9.17 AM"/>
+          <p:cNvPicPr>
+            <a:picLocks noGrp="1" noChangeAspect="1"/>
+          </p:cNvPicPr>
+          <p:nvPr>
+            <p:ph idx="1"/>
+          </p:nvPr>
+        </p:nvPicPr>
+        <p:blipFill>
+          <a:blip r:embed="rId2"/>
+          <a:stretch>
+            <a:fillRect/>
+          </a:stretch>
+        </p:blipFill>
+        <p:spPr>
+          <a:xfrm>
+            <a:off x="707390" y="1778635"/>
+            <a:ext cx="10515600" cy="1800225"/>
+          </a:xfrm>
+          <a:prstGeom prst="rect">
+            <a:avLst/>
+          </a:prstGeom>
+        </p:spPr>
+      </p:pic>
+    </p:spTree>
+  </p:cSld>
+  <p:clrMapOvr>
+    <a:masterClrMapping/>
+  </p:clrMapOvr>
+</p:sld>
+</file>
+
+<file path=ppt/slides/slide16.xml><?xml version="1.0" encoding="utf-8"?>
+<p:sld xmlns:a="http://schemas.openxmlformats.org/drawingml/2006/main" xmlns:r="http://schemas.openxmlformats.org/officeDocument/2006/relationships" xmlns:p="http://schemas.openxmlformats.org/presentationml/2006/main">
+  <p:cSld>
+    <p:spTree>
+      <p:nvGrpSpPr>
+        <p:cNvPr id="1" name=""/>
+        <p:cNvGrpSpPr/>
+        <p:nvPr/>
+      </p:nvGrpSpPr>
+      <p:grpSpPr>
+        <a:xfrm>
+          <a:off x="0" y="0"/>
+          <a:ext cx="0" cy="0"/>
+          <a:chOff x="0" y="0"/>
+          <a:chExt cx="0" cy="0"/>
+        </a:xfrm>
+      </p:grpSpPr>
+      <p:sp>
+        <p:nvSpPr>
+          <p:cNvPr id="2" name="Title 1"/>
+          <p:cNvSpPr>
+            <a:spLocks noGrp="1"/>
+          </p:cNvSpPr>
+          <p:nvPr>
+            <p:ph type="title"/>
+          </p:nvPr>
+        </p:nvSpPr>
+        <p:spPr>
+          <a:xfrm>
+            <a:off x="838200" y="365125"/>
+            <a:ext cx="10515600" cy="852805"/>
+          </a:xfrm>
+        </p:spPr>
+        <p:txBody>
+          <a:bodyPr>
+            <a:normAutofit fontScale="90000"/>
+          </a:bodyPr>
+          <a:lstStyle/>
+          <a:p>
+            <a:br>
+              <a:rPr lang="en-US" altLang="en-US" b="1" dirty="0">
+                <a:solidFill>
+                  <a:schemeClr val="accent2">
+                    <a:lumMod val="75000"/>
+                  </a:schemeClr>
+                </a:solidFill>
+                <a:sym typeface="+mn-ea"/>
+              </a:rPr>
+            </a:br>
+            <a:r>
+              <a:rPr lang="en-US" altLang="en-US" b="1" dirty="0">
+                <a:solidFill>
+                  <a:schemeClr val="accent2">
+                    <a:lumMod val="75000"/>
+                  </a:schemeClr>
+                </a:solidFill>
+                <a:sym typeface="+mn-ea"/>
+              </a:rPr>
+              <a:t>Cont...</a:t>
+            </a:r>
+            <a:br>
+              <a:rPr lang="en-US" altLang="en-US" b="1" dirty="0">
+                <a:solidFill>
+                  <a:schemeClr val="accent2">
+                    <a:lumMod val="75000"/>
+                  </a:schemeClr>
+                </a:solidFill>
+                <a:sym typeface="+mn-ea"/>
+              </a:rPr>
+            </a:br>
+            <a:endParaRPr lang="en-US"/>
+          </a:p>
+        </p:txBody>
+      </p:sp>
+      <p:pic>
+        <p:nvPicPr>
+          <p:cNvPr id="4" name="Content Placeholder 3" descr="Image 01-02-2024 at 9.22 AM"/>
+          <p:cNvPicPr>
+            <a:picLocks noGrp="1" noChangeAspect="1"/>
+          </p:cNvPicPr>
+          <p:nvPr>
+            <p:ph idx="1"/>
+          </p:nvPr>
+        </p:nvPicPr>
+        <p:blipFill>
+          <a:blip r:embed="rId2"/>
+          <a:stretch>
+            <a:fillRect/>
+          </a:stretch>
+        </p:blipFill>
+        <p:spPr>
+          <a:xfrm>
+            <a:off x="838200" y="1217930"/>
+            <a:ext cx="10515600" cy="4915535"/>
+          </a:xfrm>
+          <a:prstGeom prst="rect">
+            <a:avLst/>
+          </a:prstGeom>
+        </p:spPr>
+      </p:pic>
+    </p:spTree>
+  </p:cSld>
+  <p:clrMapOvr>
+    <a:masterClrMapping/>
+  </p:clrMapOvr>
+</p:sld>
+</file>
+
+<file path=ppt/slides/slide17.xml><?xml version="1.0" encoding="utf-8"?>
+<p:sld xmlns:a="http://schemas.openxmlformats.org/drawingml/2006/main" xmlns:r="http://schemas.openxmlformats.org/officeDocument/2006/relationships" xmlns:p="http://schemas.openxmlformats.org/presentationml/2006/main">
+  <p:cSld>
+    <p:spTree>
+      <p:nvGrpSpPr>
+        <p:cNvPr id="1" name=""/>
+        <p:cNvGrpSpPr/>
+        <p:nvPr/>
+      </p:nvGrpSpPr>
+      <p:grpSpPr>
+        <a:xfrm>
+          <a:off x="0" y="0"/>
+          <a:ext cx="0" cy="0"/>
+          <a:chOff x="0" y="0"/>
+          <a:chExt cx="0" cy="0"/>
+        </a:xfrm>
+      </p:grpSpPr>
+      <p:sp>
+        <p:nvSpPr>
+          <p:cNvPr id="2" name="Title 1"/>
+          <p:cNvSpPr>
+            <a:spLocks noGrp="1"/>
+          </p:cNvSpPr>
+          <p:nvPr>
+            <p:ph type="title"/>
+          </p:nvPr>
+        </p:nvSpPr>
+        <p:spPr>
+          <a:xfrm>
+            <a:off x="838200" y="365125"/>
+            <a:ext cx="10515600" cy="755015"/>
+          </a:xfrm>
+        </p:spPr>
+        <p:txBody>
+          <a:bodyPr>
+            <a:normAutofit fontScale="90000"/>
+          </a:bodyPr>
+          <a:lstStyle/>
+          <a:p>
+            <a:br>
+              <a:rPr lang="en-US" altLang="en-US" b="1" dirty="0">
+                <a:solidFill>
+                  <a:schemeClr val="accent2">
+                    <a:lumMod val="75000"/>
+                  </a:schemeClr>
+                </a:solidFill>
+                <a:sym typeface="+mn-ea"/>
+              </a:rPr>
+            </a:br>
+            <a:br>
+              <a:rPr lang="en-US" altLang="en-US" b="1" dirty="0">
+                <a:solidFill>
+                  <a:schemeClr val="accent2">
+                    <a:lumMod val="75000"/>
+                  </a:schemeClr>
+                </a:solidFill>
+                <a:sym typeface="+mn-ea"/>
+              </a:rPr>
+            </a:br>
+            <a:r>
+              <a:rPr lang="en-US" altLang="en-US" b="1" dirty="0">
+                <a:solidFill>
+                  <a:schemeClr val="accent2">
+                    <a:lumMod val="75000"/>
+                  </a:schemeClr>
+                </a:solidFill>
+                <a:sym typeface="+mn-ea"/>
+              </a:rPr>
+              <a:t>Concatenation</a:t>
+            </a:r>
+            <a:br>
+              <a:rPr lang="en-US" altLang="en-US" b="1" dirty="0">
+                <a:solidFill>
+                  <a:schemeClr val="accent2">
+                    <a:lumMod val="75000"/>
+                  </a:schemeClr>
+                </a:solidFill>
+                <a:sym typeface="+mn-ea"/>
+              </a:rPr>
+            </a:br>
+            <a:br>
+              <a:rPr lang="en-US"/>
+            </a:br>
+            <a:endParaRPr lang="en-US"/>
+          </a:p>
+        </p:txBody>
+      </p:sp>
+      <p:pic>
+        <p:nvPicPr>
+          <p:cNvPr id="4" name="Content Placeholder 3" descr="Image 01-02-2024 at 9.24 AM"/>
+          <p:cNvPicPr>
+            <a:picLocks noGrp="1" noChangeAspect="1"/>
+          </p:cNvPicPr>
+          <p:nvPr>
+            <p:ph idx="1"/>
+          </p:nvPr>
+        </p:nvPicPr>
+        <p:blipFill>
+          <a:blip r:embed="rId2"/>
+          <a:stretch>
+            <a:fillRect/>
+          </a:stretch>
+        </p:blipFill>
+        <p:spPr>
+          <a:xfrm>
+            <a:off x="838200" y="1572260"/>
+            <a:ext cx="10759440" cy="2423795"/>
+          </a:xfrm>
+          <a:prstGeom prst="rect">
+            <a:avLst/>
+          </a:prstGeom>
+        </p:spPr>
+      </p:pic>
+      <p:pic>
+        <p:nvPicPr>
+          <p:cNvPr id="5" name="Picture 4" descr="Image 01-02-2024 at 9.26 AM"/>
+          <p:cNvPicPr>
+            <a:picLocks noChangeAspect="1"/>
+          </p:cNvPicPr>
+          <p:nvPr/>
+        </p:nvPicPr>
+        <p:blipFill>
+          <a:blip r:embed="rId3"/>
+          <a:stretch>
+            <a:fillRect/>
+          </a:stretch>
+        </p:blipFill>
+        <p:spPr>
+          <a:xfrm>
+            <a:off x="1930400" y="4448175"/>
+            <a:ext cx="8331200" cy="1092200"/>
+          </a:xfrm>
+          <a:prstGeom prst="rect">
+            <a:avLst/>
+          </a:prstGeom>
+        </p:spPr>
+      </p:pic>
+    </p:spTree>
+  </p:cSld>
+  <p:clrMapOvr>
+    <a:masterClrMapping/>
+  </p:clrMapOvr>
+</p:sld>
+</file>
+
+<file path=ppt/slides/slide18.xml><?xml version="1.0" encoding="utf-8"?>
+<p:sld xmlns:a="http://schemas.openxmlformats.org/drawingml/2006/main" xmlns:r="http://schemas.openxmlformats.org/officeDocument/2006/relationships" xmlns:p="http://schemas.openxmlformats.org/presentationml/2006/main">
+  <p:cSld>
+    <p:spTree>
+      <p:nvGrpSpPr>
+        <p:cNvPr id="1" name=""/>
+        <p:cNvGrpSpPr/>
+        <p:nvPr/>
+      </p:nvGrpSpPr>
+      <p:grpSpPr>
+        <a:xfrm>
+          <a:off x="0" y="0"/>
+          <a:ext cx="0" cy="0"/>
+          <a:chOff x="0" y="0"/>
+          <a:chExt cx="0" cy="0"/>
+        </a:xfrm>
+      </p:grpSpPr>
+      <p:sp>
+        <p:nvSpPr>
+          <p:cNvPr id="2" name="Title 1"/>
+          <p:cNvSpPr>
+            <a:spLocks noGrp="1"/>
+          </p:cNvSpPr>
+          <p:nvPr>
+            <p:ph type="title"/>
+          </p:nvPr>
+        </p:nvSpPr>
+        <p:spPr>
+          <a:xfrm>
+            <a:off x="838200" y="365125"/>
+            <a:ext cx="10515600" cy="788035"/>
+          </a:xfrm>
+        </p:spPr>
+        <p:txBody>
+          <a:bodyPr>
+            <a:normAutofit fontScale="90000"/>
+          </a:bodyPr>
+          <a:lstStyle/>
+          <a:p>
+            <a:br>
+              <a:rPr lang="en-US" altLang="en-US" b="1" dirty="0">
+                <a:solidFill>
+                  <a:schemeClr val="accent2">
+                    <a:lumMod val="75000"/>
+                  </a:schemeClr>
+                </a:solidFill>
+                <a:sym typeface="+mn-ea"/>
+              </a:rPr>
+            </a:br>
+            <a:br>
+              <a:rPr lang="en-US" altLang="en-US" b="1" dirty="0">
+                <a:solidFill>
+                  <a:schemeClr val="accent2">
+                    <a:lumMod val="75000"/>
+                  </a:schemeClr>
+                </a:solidFill>
+                <a:sym typeface="+mn-ea"/>
+              </a:rPr>
+            </a:br>
+            <a:r>
+              <a:rPr lang="en-US" altLang="en-US" b="1" dirty="0">
+                <a:solidFill>
+                  <a:schemeClr val="accent2">
+                    <a:lumMod val="75000"/>
+                  </a:schemeClr>
+                </a:solidFill>
+                <a:sym typeface="+mn-ea"/>
+              </a:rPr>
+              <a:t>Cont...</a:t>
+            </a:r>
+            <a:br>
+              <a:rPr lang="en-US" altLang="en-US" b="1" dirty="0">
+                <a:solidFill>
+                  <a:schemeClr val="accent2">
+                    <a:lumMod val="75000"/>
+                  </a:schemeClr>
+                </a:solidFill>
+                <a:sym typeface="+mn-ea"/>
+              </a:rPr>
+            </a:br>
+            <a:br>
+              <a:rPr lang="en-US"/>
+            </a:br>
+            <a:endParaRPr lang="en-US"/>
+          </a:p>
+        </p:txBody>
+      </p:sp>
+      <p:pic>
+        <p:nvPicPr>
+          <p:cNvPr id="4" name="Content Placeholder 3" descr="Image 01-02-2024 at 9.27 AM"/>
+          <p:cNvPicPr>
+            <a:picLocks noGrp="1" noChangeAspect="1"/>
+          </p:cNvPicPr>
+          <p:nvPr>
+            <p:ph idx="1"/>
+          </p:nvPr>
+        </p:nvPicPr>
+        <p:blipFill>
+          <a:blip r:embed="rId2"/>
+          <a:stretch>
+            <a:fillRect/>
+          </a:stretch>
+        </p:blipFill>
+        <p:spPr>
+          <a:xfrm>
+            <a:off x="838200" y="1460500"/>
+            <a:ext cx="10515600" cy="2910840"/>
+          </a:xfrm>
+          <a:prstGeom prst="rect">
+            <a:avLst/>
+          </a:prstGeom>
+        </p:spPr>
+      </p:pic>
+    </p:spTree>
+  </p:cSld>
+  <p:clrMapOvr>
+    <a:masterClrMapping/>
+  </p:clrMapOvr>
+</p:sld>
+</file>
+
+<file path=ppt/slides/slide19.xml><?xml version="1.0" encoding="utf-8"?>
+<p:sld xmlns:a="http://schemas.openxmlformats.org/drawingml/2006/main" xmlns:r="http://schemas.openxmlformats.org/officeDocument/2006/relationships" xmlns:p="http://schemas.openxmlformats.org/presentationml/2006/main">
+  <p:cSld>
+    <p:spTree>
+      <p:nvGrpSpPr>
+        <p:cNvPr id="1" name=""/>
+        <p:cNvGrpSpPr/>
+        <p:nvPr/>
+      </p:nvGrpSpPr>
+      <p:grpSpPr>
+        <a:xfrm>
+          <a:off x="0" y="0"/>
+          <a:ext cx="0" cy="0"/>
+          <a:chOff x="0" y="0"/>
+          <a:chExt cx="0" cy="0"/>
+        </a:xfrm>
+      </p:grpSpPr>
+      <p:sp>
+        <p:nvSpPr>
+          <p:cNvPr id="2" name="Title 1"/>
+          <p:cNvSpPr>
+            <a:spLocks noGrp="1"/>
+          </p:cNvSpPr>
+          <p:nvPr>
+            <p:ph type="title"/>
+          </p:nvPr>
+        </p:nvSpPr>
+        <p:spPr>
+          <a:xfrm>
+            <a:off x="838200" y="365125"/>
+            <a:ext cx="10515600" cy="803275"/>
+          </a:xfrm>
+        </p:spPr>
+        <p:txBody>
+          <a:bodyPr>
+            <a:normAutofit/>
+          </a:bodyPr>
+          <a:lstStyle/>
+          <a:p>
+            <a:r>
+              <a:rPr lang="en-US" altLang="en-US" b="1" dirty="0">
+                <a:solidFill>
+                  <a:schemeClr val="accent2">
+                    <a:lumMod val="75000"/>
+                  </a:schemeClr>
+                </a:solidFill>
+                <a:sym typeface="+mn-ea"/>
+              </a:rPr>
+              <a:t>Cont...</a:t>
+            </a:r>
+            <a:endParaRPr lang="en-US"/>
+          </a:p>
+        </p:txBody>
+      </p:sp>
+      <p:pic>
+        <p:nvPicPr>
+          <p:cNvPr id="4" name="Content Placeholder 3" descr="Image 01-02-2024 at 9.34 AM"/>
+          <p:cNvPicPr>
+            <a:picLocks noGrp="1" noChangeAspect="1"/>
+          </p:cNvPicPr>
+          <p:nvPr>
+            <p:ph idx="1"/>
+          </p:nvPr>
+        </p:nvPicPr>
+        <p:blipFill>
+          <a:blip r:embed="rId2"/>
+          <a:stretch>
+            <a:fillRect/>
+          </a:stretch>
+        </p:blipFill>
+        <p:spPr>
+          <a:xfrm>
+            <a:off x="838200" y="1377315"/>
+            <a:ext cx="10515600" cy="4169410"/>
+          </a:xfrm>
+          <a:prstGeom prst="rect">
+            <a:avLst/>
+          </a:prstGeom>
+        </p:spPr>
+      </p:pic>
+    </p:spTree>
+  </p:cSld>
+  <p:clrMapOvr>
+    <a:masterClrMapping/>
+  </p:clrMapOvr>
+</p:sld>
+</file>
+
+<file path=ppt/slides/slide2.xml><?xml version="1.0" encoding="utf-8"?>
+<p:sld xmlns:a="http://schemas.openxmlformats.org/drawingml/2006/main" xmlns:r="http://schemas.openxmlformats.org/officeDocument/2006/relationships" xmlns:p="http://schemas.openxmlformats.org/presentationml/2006/main">
+  <p:cSld>
+    <p:spTree>
+      <p:nvGrpSpPr>
+        <p:cNvPr id="1" name=""/>
+        <p:cNvGrpSpPr/>
+        <p:nvPr/>
+      </p:nvGrpSpPr>
+      <p:grpSpPr>
+        <a:xfrm>
+          <a:off x="0" y="0"/>
+          <a:ext cx="0" cy="0"/>
+          <a:chOff x="0" y="0"/>
+          <a:chExt cx="0" cy="0"/>
+        </a:xfrm>
+      </p:grpSpPr>
+      <p:sp>
+        <p:nvSpPr>
+          <p:cNvPr id="2" name="Title 1"/>
+          <p:cNvSpPr>
+            <a:spLocks noGrp="1"/>
+          </p:cNvSpPr>
+          <p:nvPr>
+            <p:ph type="title"/>
+          </p:nvPr>
+        </p:nvSpPr>
+        <p:spPr>
+          <a:xfrm>
+            <a:off x="838200" y="536659"/>
+            <a:ext cx="10515600" cy="714626"/>
+          </a:xfrm>
+        </p:spPr>
+        <p:txBody>
+          <a:bodyPr/>
+          <a:lstStyle/>
+          <a:p>
+            <a:r>
+              <a:rPr lang="en-US" b="1" dirty="0">
+                <a:solidFill>
+                  <a:schemeClr val="accent2">
+                    <a:lumMod val="75000"/>
+                  </a:schemeClr>
+                </a:solidFill>
+              </a:rPr>
+              <a:t>Course Objective</a:t>
+            </a:r>
+            <a:endParaRPr lang="en-US" dirty="0">
+              <a:solidFill>
+                <a:schemeClr val="accent2">
+                  <a:lumMod val="75000"/>
+                </a:schemeClr>
+              </a:solidFill>
+            </a:endParaRPr>
+          </a:p>
+        </p:txBody>
+      </p:sp>
+      <p:sp>
+        <p:nvSpPr>
+          <p:cNvPr id="3" name="Content Placeholder 2"/>
+          <p:cNvSpPr>
+            <a:spLocks noGrp="1"/>
+          </p:cNvSpPr>
+          <p:nvPr>
+            <p:ph idx="1"/>
+          </p:nvPr>
+        </p:nvSpPr>
+        <p:spPr>
+          <a:xfrm>
+            <a:off x="838200" y="1435100"/>
+            <a:ext cx="10088245" cy="4886325"/>
+          </a:xfrm>
+        </p:spPr>
+        <p:txBody>
+          <a:bodyPr>
+            <a:normAutofit/>
+          </a:bodyPr>
+          <a:lstStyle/>
+          <a:p>
+            <a:pPr algn="just"/>
+            <a:r>
+              <a:rPr lang="en-US" dirty="0"/>
+              <a:t>To have a clear understanding of automata theory concepts.</a:t>
+            </a:r>
+          </a:p>
+          <a:p>
+            <a:pPr algn="just"/>
+            <a:r>
+              <a:rPr lang="en-US" dirty="0"/>
+              <a:t>To understand that regular and context free languages are useful models for many important kinds of hardware and software.</a:t>
+            </a:r>
+          </a:p>
+          <a:p>
+            <a:pPr algn="just"/>
+            <a:r>
+              <a:rPr lang="en-US" dirty="0"/>
+              <a:t>To be able to understand the use of regular and context free languages in solving problems such as lexical analysis, text processing etc.</a:t>
+            </a:r>
+          </a:p>
+        </p:txBody>
+      </p:sp>
+    </p:spTree>
+  </p:cSld>
+  <p:clrMapOvr>
+    <a:masterClrMapping/>
+  </p:clrMapOvr>
+</p:sld>
+</file>
+
+<file path=ppt/slides/slide20.xml><?xml version="1.0" encoding="utf-8"?>
+<p:sld xmlns:a="http://schemas.openxmlformats.org/drawingml/2006/main" xmlns:r="http://schemas.openxmlformats.org/officeDocument/2006/relationships" xmlns:p="http://schemas.openxmlformats.org/presentationml/2006/main">
+  <p:cSld>
+    <p:spTree>
+      <p:nvGrpSpPr>
+        <p:cNvPr id="1" name=""/>
+        <p:cNvGrpSpPr/>
+        <p:nvPr/>
+      </p:nvGrpSpPr>
+      <p:grpSpPr>
+        <a:xfrm>
+          <a:off x="0" y="0"/>
+          <a:ext cx="0" cy="0"/>
+          <a:chOff x="0" y="0"/>
+          <a:chExt cx="0" cy="0"/>
+        </a:xfrm>
+      </p:grpSpPr>
+      <p:sp>
+        <p:nvSpPr>
+          <p:cNvPr id="2" name="Title 1"/>
+          <p:cNvSpPr>
+            <a:spLocks noGrp="1"/>
+          </p:cNvSpPr>
+          <p:nvPr>
+            <p:ph type="title"/>
+          </p:nvPr>
+        </p:nvSpPr>
+        <p:spPr>
+          <a:xfrm>
+            <a:off x="838200" y="365125"/>
+            <a:ext cx="10515600" cy="934720"/>
+          </a:xfrm>
+        </p:spPr>
+        <p:txBody>
+          <a:bodyPr/>
+          <a:lstStyle/>
+          <a:p>
+            <a:r>
+              <a:rPr lang="en-US" altLang="en-US" b="1" dirty="0">
+                <a:solidFill>
+                  <a:schemeClr val="accent2">
+                    <a:lumMod val="75000"/>
+                  </a:schemeClr>
+                </a:solidFill>
+                <a:sym typeface="+mn-ea"/>
+              </a:rPr>
+              <a:t>Cont...</a:t>
+            </a:r>
+            <a:endParaRPr lang="en-US"/>
+          </a:p>
+        </p:txBody>
+      </p:sp>
+      <p:pic>
+        <p:nvPicPr>
+          <p:cNvPr id="4" name="Content Placeholder 3" descr="Image 01-02-2024 at 9.36 AM"/>
+          <p:cNvPicPr>
+            <a:picLocks noGrp="1" noChangeAspect="1"/>
+          </p:cNvPicPr>
+          <p:nvPr>
+            <p:ph idx="1"/>
+          </p:nvPr>
+        </p:nvPicPr>
+        <p:blipFill>
+          <a:blip r:embed="rId2"/>
+          <a:stretch>
+            <a:fillRect/>
+          </a:stretch>
+        </p:blipFill>
+        <p:spPr>
+          <a:xfrm>
+            <a:off x="838200" y="1663700"/>
+            <a:ext cx="10515600" cy="4201795"/>
+          </a:xfrm>
+          <a:prstGeom prst="rect">
+            <a:avLst/>
+          </a:prstGeom>
+        </p:spPr>
+      </p:pic>
+    </p:spTree>
+  </p:cSld>
+  <p:clrMapOvr>
+    <a:masterClrMapping/>
+  </p:clrMapOvr>
+</p:sld>
+</file>
+
+<file path=ppt/slides/slide21.xml><?xml version="1.0" encoding="utf-8"?>
+<p:sld xmlns:a="http://schemas.openxmlformats.org/drawingml/2006/main" xmlns:r="http://schemas.openxmlformats.org/officeDocument/2006/relationships" xmlns:p="http://schemas.openxmlformats.org/presentationml/2006/main">
+  <p:cSld>
+    <p:spTree>
+      <p:nvGrpSpPr>
+        <p:cNvPr id="1" name=""/>
+        <p:cNvGrpSpPr/>
+        <p:nvPr/>
+      </p:nvGrpSpPr>
+      <p:grpSpPr>
+        <a:xfrm>
+          <a:off x="0" y="0"/>
+          <a:ext cx="0" cy="0"/>
+          <a:chOff x="0" y="0"/>
+          <a:chExt cx="0" cy="0"/>
+        </a:xfrm>
+      </p:grpSpPr>
+      <p:sp>
+        <p:nvSpPr>
+          <p:cNvPr id="2" name="Title 1"/>
+          <p:cNvSpPr>
+            <a:spLocks noGrp="1"/>
+          </p:cNvSpPr>
+          <p:nvPr>
+            <p:ph type="title"/>
+          </p:nvPr>
+        </p:nvSpPr>
+        <p:spPr>
+          <a:xfrm>
+            <a:off x="838200" y="365125"/>
+            <a:ext cx="10515600" cy="950595"/>
+          </a:xfrm>
+        </p:spPr>
+        <p:txBody>
+          <a:bodyPr>
+            <a:normAutofit fontScale="90000"/>
+          </a:bodyPr>
+          <a:lstStyle/>
+          <a:p>
+            <a:br>
+              <a:rPr lang="en-US" altLang="en-US" b="1" dirty="0">
+                <a:solidFill>
+                  <a:schemeClr val="accent2">
+                    <a:lumMod val="75000"/>
+                  </a:schemeClr>
+                </a:solidFill>
+              </a:rPr>
+            </a:br>
+            <a:r>
+              <a:rPr lang="en-US" altLang="en-US" b="1" dirty="0">
+                <a:solidFill>
+                  <a:schemeClr val="accent2">
+                    <a:lumMod val="75000"/>
+                  </a:schemeClr>
+                </a:solidFill>
+              </a:rPr>
+              <a:t>Palindrome</a:t>
+            </a:r>
+            <a:br>
+              <a:rPr lang="en-US" altLang="en-US" b="1" dirty="0">
+                <a:solidFill>
+                  <a:schemeClr val="accent2">
+                    <a:lumMod val="75000"/>
+                  </a:schemeClr>
+                </a:solidFill>
+              </a:rPr>
+            </a:br>
+            <a:endParaRPr lang="en-US"/>
+          </a:p>
+        </p:txBody>
+      </p:sp>
+      <p:pic>
+        <p:nvPicPr>
+          <p:cNvPr id="4" name="Content Placeholder 3" descr="Image 01-02-2024 at 9.47 AM"/>
+          <p:cNvPicPr>
+            <a:picLocks noGrp="1" noChangeAspect="1"/>
+          </p:cNvPicPr>
+          <p:nvPr>
+            <p:ph idx="1"/>
+          </p:nvPr>
+        </p:nvPicPr>
+        <p:blipFill>
+          <a:blip r:embed="rId2"/>
+          <a:stretch>
+            <a:fillRect/>
+          </a:stretch>
+        </p:blipFill>
+        <p:spPr>
+          <a:xfrm>
+            <a:off x="1550670" y="1205865"/>
+            <a:ext cx="9267825" cy="5395595"/>
+          </a:xfrm>
+          <a:prstGeom prst="rect">
+            <a:avLst/>
+          </a:prstGeom>
+        </p:spPr>
+      </p:pic>
+    </p:spTree>
+  </p:cSld>
+  <p:clrMapOvr>
+    <a:masterClrMapping/>
+  </p:clrMapOvr>
+</p:sld>
+</file>
+
+<file path=ppt/slides/slide22.xml><?xml version="1.0" encoding="utf-8"?>
+<p:sld xmlns:a="http://schemas.openxmlformats.org/drawingml/2006/main" xmlns:r="http://schemas.openxmlformats.org/officeDocument/2006/relationships" xmlns:p="http://schemas.openxmlformats.org/presentationml/2006/main">
+  <p:cSld>
+    <p:spTree>
+      <p:nvGrpSpPr>
+        <p:cNvPr id="1" name=""/>
+        <p:cNvGrpSpPr/>
+        <p:nvPr/>
+      </p:nvGrpSpPr>
+      <p:grpSpPr>
+        <a:xfrm>
+          <a:off x="0" y="0"/>
+          <a:ext cx="0" cy="0"/>
+          <a:chOff x="0" y="0"/>
+          <a:chExt cx="0" cy="0"/>
+        </a:xfrm>
+      </p:grpSpPr>
+      <p:sp>
+        <p:nvSpPr>
+          <p:cNvPr id="2" name="Title 1"/>
+          <p:cNvSpPr>
+            <a:spLocks noGrp="1"/>
+          </p:cNvSpPr>
+          <p:nvPr>
+            <p:ph type="title"/>
+          </p:nvPr>
+        </p:nvSpPr>
+        <p:spPr>
+          <a:xfrm>
+            <a:off x="838200" y="365125"/>
+            <a:ext cx="10515600" cy="819150"/>
+          </a:xfrm>
+        </p:spPr>
+        <p:txBody>
+          <a:bodyPr>
+            <a:normAutofit/>
+          </a:bodyPr>
+          <a:lstStyle/>
+          <a:p>
+            <a:r>
+              <a:rPr lang="en-US" altLang="en-US" b="1" dirty="0">
+                <a:solidFill>
+                  <a:schemeClr val="accent2">
+                    <a:lumMod val="75000"/>
+                  </a:schemeClr>
+                </a:solidFill>
+              </a:rPr>
+              <a:t>Kleene Star</a:t>
+            </a:r>
+          </a:p>
+        </p:txBody>
+      </p:sp>
+      <p:pic>
+        <p:nvPicPr>
+          <p:cNvPr id="4" name="Content Placeholder 3" descr="Image 01-02-2024 at 9.49 AM"/>
+          <p:cNvPicPr>
+            <a:picLocks noGrp="1" noChangeAspect="1"/>
+          </p:cNvPicPr>
+          <p:nvPr>
+            <p:ph idx="1"/>
+          </p:nvPr>
+        </p:nvPicPr>
+        <p:blipFill>
+          <a:blip r:embed="rId2"/>
+          <a:stretch>
+            <a:fillRect/>
+          </a:stretch>
+        </p:blipFill>
+        <p:spPr>
+          <a:xfrm>
+            <a:off x="838200" y="1451610"/>
+            <a:ext cx="10515600" cy="4593590"/>
+          </a:xfrm>
+          <a:prstGeom prst="rect">
+            <a:avLst/>
+          </a:prstGeom>
+        </p:spPr>
+      </p:pic>
+    </p:spTree>
+  </p:cSld>
+  <p:clrMapOvr>
+    <a:masterClrMapping/>
+  </p:clrMapOvr>
+</p:sld>
+</file>
+
+<file path=ppt/slides/slide23.xml><?xml version="1.0" encoding="utf-8"?>
+<p:sld xmlns:a="http://schemas.openxmlformats.org/drawingml/2006/main" xmlns:r="http://schemas.openxmlformats.org/officeDocument/2006/relationships" xmlns:p="http://schemas.openxmlformats.org/presentationml/2006/main">
+  <p:cSld>
+    <p:spTree>
+      <p:nvGrpSpPr>
+        <p:cNvPr id="1" name=""/>
+        <p:cNvGrpSpPr/>
+        <p:nvPr/>
+      </p:nvGrpSpPr>
+      <p:grpSpPr>
+        <a:xfrm>
+          <a:off x="0" y="0"/>
+          <a:ext cx="0" cy="0"/>
+          <a:chOff x="0" y="0"/>
+          <a:chExt cx="0" cy="0"/>
+        </a:xfrm>
+      </p:grpSpPr>
+      <p:sp>
+        <p:nvSpPr>
+          <p:cNvPr id="2" name="Title 1"/>
+          <p:cNvSpPr>
+            <a:spLocks noGrp="1"/>
+          </p:cNvSpPr>
+          <p:nvPr>
+            <p:ph type="title"/>
+          </p:nvPr>
+        </p:nvSpPr>
+        <p:spPr/>
+        <p:txBody>
+          <a:bodyPr/>
+          <a:lstStyle/>
+          <a:p>
+            <a:r>
+              <a:rPr lang="en-US" altLang="en-US" b="1" dirty="0">
+                <a:solidFill>
+                  <a:schemeClr val="accent2">
+                    <a:lumMod val="75000"/>
+                  </a:schemeClr>
+                </a:solidFill>
+                <a:sym typeface="+mn-ea"/>
+              </a:rPr>
+              <a:t>Kleene Star - Example</a:t>
+            </a:r>
+            <a:endParaRPr lang="en-US"/>
+          </a:p>
+        </p:txBody>
+      </p:sp>
+      <p:pic>
+        <p:nvPicPr>
+          <p:cNvPr id="4" name="Content Placeholder 3" descr="Image 01-02-2024 at 9.50 AM"/>
+          <p:cNvPicPr>
+            <a:picLocks noGrp="1" noChangeAspect="1"/>
+          </p:cNvPicPr>
+          <p:nvPr>
+            <p:ph idx="1"/>
+          </p:nvPr>
+        </p:nvPicPr>
+        <p:blipFill>
+          <a:blip r:embed="rId2"/>
+          <a:stretch>
+            <a:fillRect/>
+          </a:stretch>
+        </p:blipFill>
+        <p:spPr>
+          <a:xfrm>
+            <a:off x="1400175" y="1825625"/>
+            <a:ext cx="9391015" cy="4351655"/>
+          </a:xfrm>
+          <a:prstGeom prst="rect">
+            <a:avLst/>
+          </a:prstGeom>
+        </p:spPr>
+      </p:pic>
+    </p:spTree>
+  </p:cSld>
+  <p:clrMapOvr>
+    <a:masterClrMapping/>
+  </p:clrMapOvr>
+</p:sld>
+</file>
+
+<file path=ppt/slides/slide24.xml><?xml version="1.0" encoding="utf-8"?>
+<p:sld xmlns:a="http://schemas.openxmlformats.org/drawingml/2006/main" xmlns:r="http://schemas.openxmlformats.org/officeDocument/2006/relationships" xmlns:p="http://schemas.openxmlformats.org/presentationml/2006/main">
+  <p:cSld>
+    <p:spTree>
+      <p:nvGrpSpPr>
+        <p:cNvPr id="1" name=""/>
+        <p:cNvGrpSpPr/>
+        <p:nvPr/>
+      </p:nvGrpSpPr>
+      <p:grpSpPr>
+        <a:xfrm>
+          <a:off x="0" y="0"/>
+          <a:ext cx="0" cy="0"/>
+          <a:chOff x="0" y="0"/>
+          <a:chExt cx="0" cy="0"/>
+        </a:xfrm>
+      </p:grpSpPr>
+      <p:sp>
+        <p:nvSpPr>
+          <p:cNvPr id="2" name="Title 1"/>
+          <p:cNvSpPr>
+            <a:spLocks noGrp="1"/>
+          </p:cNvSpPr>
+          <p:nvPr>
+            <p:ph type="title"/>
+          </p:nvPr>
+        </p:nvSpPr>
+        <p:spPr>
+          <a:xfrm>
+            <a:off x="838200" y="365125"/>
+            <a:ext cx="10515600" cy="934720"/>
+          </a:xfrm>
+        </p:spPr>
+        <p:txBody>
+          <a:bodyPr/>
+          <a:lstStyle/>
+          <a:p>
+            <a:r>
+              <a:rPr lang="en-US" altLang="en-US" b="1" dirty="0">
+                <a:solidFill>
+                  <a:schemeClr val="accent2">
+                    <a:lumMod val="75000"/>
+                  </a:schemeClr>
+                </a:solidFill>
+              </a:rPr>
+              <a:t>Cont...</a:t>
+            </a:r>
+          </a:p>
+        </p:txBody>
+      </p:sp>
+      <p:pic>
+        <p:nvPicPr>
+          <p:cNvPr id="4" name="Content Placeholder 3" descr="Image 01-02-2024 at 9.51 AM"/>
+          <p:cNvPicPr>
+            <a:picLocks noGrp="1" noChangeAspect="1"/>
+          </p:cNvPicPr>
+          <p:nvPr>
+            <p:ph idx="1"/>
+          </p:nvPr>
+        </p:nvPicPr>
+        <p:blipFill>
+          <a:blip r:embed="rId2"/>
+          <a:stretch>
+            <a:fillRect/>
+          </a:stretch>
+        </p:blipFill>
+        <p:spPr>
+          <a:xfrm>
+            <a:off x="838200" y="1702435"/>
+            <a:ext cx="10515600" cy="4071620"/>
+          </a:xfrm>
+          <a:prstGeom prst="rect">
+            <a:avLst/>
+          </a:prstGeom>
+        </p:spPr>
+      </p:pic>
+    </p:spTree>
+  </p:cSld>
+  <p:clrMapOvr>
+    <a:masterClrMapping/>
+  </p:clrMapOvr>
+</p:sld>
+</file>
+
+<file path=ppt/slides/slide25.xml><?xml version="1.0" encoding="utf-8"?>
+<p:sld xmlns:a="http://schemas.openxmlformats.org/drawingml/2006/main" xmlns:r="http://schemas.openxmlformats.org/officeDocument/2006/relationships" xmlns:p="http://schemas.openxmlformats.org/presentationml/2006/main">
+  <p:cSld>
+    <p:spTree>
+      <p:nvGrpSpPr>
+        <p:cNvPr id="1" name=""/>
+        <p:cNvGrpSpPr/>
+        <p:nvPr/>
+      </p:nvGrpSpPr>
+      <p:grpSpPr>
+        <a:xfrm>
+          <a:off x="0" y="0"/>
+          <a:ext cx="0" cy="0"/>
+          <a:chOff x="0" y="0"/>
+          <a:chExt cx="0" cy="0"/>
+        </a:xfrm>
+      </p:grpSpPr>
+      <p:pic>
+        <p:nvPicPr>
+          <p:cNvPr id="4" name="Content Placeholder 3" descr="Image 01-02-2024 at 9.53 AM"/>
+          <p:cNvPicPr>
+            <a:picLocks noGrp="1" noChangeAspect="1"/>
+          </p:cNvPicPr>
+          <p:nvPr>
+            <p:ph idx="1"/>
+          </p:nvPr>
+        </p:nvPicPr>
+        <p:blipFill>
+          <a:blip r:embed="rId2"/>
+          <a:stretch>
+            <a:fillRect/>
+          </a:stretch>
+        </p:blipFill>
+        <p:spPr>
+          <a:xfrm>
+            <a:off x="838200" y="2515870"/>
+            <a:ext cx="10515600" cy="1062990"/>
+          </a:xfrm>
+          <a:prstGeom prst="rect">
+            <a:avLst/>
+          </a:prstGeom>
+        </p:spPr>
+      </p:pic>
+    </p:spTree>
+  </p:cSld>
+  <p:clrMapOvr>
+    <a:masterClrMapping/>
+  </p:clrMapOvr>
+</p:sld>
+</file>
+
+<file path=ppt/slides/slide26.xml><?xml version="1.0" encoding="utf-8"?>
+<p:sld xmlns:a="http://schemas.openxmlformats.org/drawingml/2006/main" xmlns:r="http://schemas.openxmlformats.org/officeDocument/2006/relationships" xmlns:p="http://schemas.openxmlformats.org/presentationml/2006/main">
+  <p:cSld>
+    <p:spTree>
+      <p:nvGrpSpPr>
+        <p:cNvPr id="1" name=""/>
+        <p:cNvGrpSpPr/>
+        <p:nvPr/>
+      </p:nvGrpSpPr>
+      <p:grpSpPr>
+        <a:xfrm>
+          <a:off x="0" y="0"/>
+          <a:ext cx="0" cy="0"/>
+          <a:chOff x="0" y="0"/>
+          <a:chExt cx="0" cy="0"/>
+        </a:xfrm>
+      </p:grpSpPr>
+      <p:sp>
+        <p:nvSpPr>
+          <p:cNvPr id="2" name="Title 1"/>
+          <p:cNvSpPr>
+            <a:spLocks noGrp="1"/>
+          </p:cNvSpPr>
+          <p:nvPr>
+            <p:ph type="title"/>
+          </p:nvPr>
+        </p:nvSpPr>
+        <p:spPr>
+          <a:xfrm>
+            <a:off x="838200" y="365125"/>
+            <a:ext cx="10515600" cy="676275"/>
+          </a:xfrm>
+        </p:spPr>
+        <p:txBody>
+          <a:bodyPr>
+            <a:normAutofit fontScale="90000"/>
+          </a:bodyPr>
+          <a:lstStyle/>
+          <a:p>
+            <a:br>
+              <a:rPr lang="en-US" altLang="en-US" b="1" dirty="0">
+                <a:solidFill>
+                  <a:schemeClr val="accent2">
+                    <a:lumMod val="75000"/>
+                  </a:schemeClr>
+                </a:solidFill>
+                <a:sym typeface="+mn-ea"/>
+              </a:rPr>
+            </a:br>
+            <a:r>
+              <a:rPr lang="en-US" altLang="en-US" b="1" dirty="0">
+                <a:solidFill>
+                  <a:schemeClr val="accent2">
+                    <a:lumMod val="75000"/>
+                  </a:schemeClr>
+                </a:solidFill>
+                <a:sym typeface="+mn-ea"/>
+              </a:rPr>
+              <a:t>Cont...</a:t>
+            </a:r>
+            <a:br>
+              <a:rPr lang="en-US" altLang="en-US" b="1" dirty="0">
+                <a:solidFill>
+                  <a:schemeClr val="accent2">
+                    <a:lumMod val="75000"/>
+                  </a:schemeClr>
+                </a:solidFill>
+              </a:rPr>
+            </a:br>
+            <a:endParaRPr lang="en-US"/>
+          </a:p>
+        </p:txBody>
+      </p:sp>
+      <p:pic>
+        <p:nvPicPr>
+          <p:cNvPr id="4" name="Content Placeholder 3" descr="Image 01-02-2024 at 9.55 AM"/>
+          <p:cNvPicPr>
+            <a:picLocks noGrp="1" noChangeAspect="1"/>
+          </p:cNvPicPr>
+          <p:nvPr>
+            <p:ph idx="1"/>
+          </p:nvPr>
+        </p:nvPicPr>
+        <p:blipFill>
+          <a:blip r:embed="rId2"/>
+          <a:stretch>
+            <a:fillRect/>
+          </a:stretch>
+        </p:blipFill>
+        <p:spPr>
+          <a:xfrm>
+            <a:off x="2283460" y="1248410"/>
+            <a:ext cx="7972425" cy="5405755"/>
+          </a:xfrm>
+          <a:prstGeom prst="rect">
+            <a:avLst/>
+          </a:prstGeom>
+        </p:spPr>
+      </p:pic>
+    </p:spTree>
+  </p:cSld>
+  <p:clrMapOvr>
+    <a:masterClrMapping/>
+  </p:clrMapOvr>
+</p:sld>
+</file>
+
+<file path=ppt/slides/slide27.xml><?xml version="1.0" encoding="utf-8"?>
+<p:sld xmlns:a="http://schemas.openxmlformats.org/drawingml/2006/main" xmlns:r="http://schemas.openxmlformats.org/officeDocument/2006/relationships" xmlns:p="http://schemas.openxmlformats.org/presentationml/2006/main">
+  <p:cSld>
+    <p:spTree>
+      <p:nvGrpSpPr>
+        <p:cNvPr id="1" name=""/>
+        <p:cNvGrpSpPr/>
+        <p:nvPr/>
+      </p:nvGrpSpPr>
+      <p:grpSpPr>
+        <a:xfrm>
+          <a:off x="0" y="0"/>
+          <a:ext cx="0" cy="0"/>
+          <a:chOff x="0" y="0"/>
+          <a:chExt cx="0" cy="0"/>
+        </a:xfrm>
+      </p:grpSpPr>
+      <p:sp>
+        <p:nvSpPr>
+          <p:cNvPr id="2" name="Title 1"/>
+          <p:cNvSpPr>
+            <a:spLocks noGrp="1"/>
+          </p:cNvSpPr>
+          <p:nvPr>
+            <p:ph type="title"/>
+          </p:nvPr>
+        </p:nvSpPr>
+        <p:spPr>
+          <a:xfrm>
+            <a:off x="838200" y="365125"/>
+            <a:ext cx="10515600" cy="734695"/>
+          </a:xfrm>
+        </p:spPr>
+        <p:txBody>
+          <a:bodyPr>
+            <a:normAutofit fontScale="90000"/>
+          </a:bodyPr>
+          <a:lstStyle/>
+          <a:p>
+            <a:br>
+              <a:rPr lang="en-US" altLang="en-US" b="1" dirty="0">
+                <a:solidFill>
+                  <a:schemeClr val="accent2">
+                    <a:lumMod val="75000"/>
+                  </a:schemeClr>
+                </a:solidFill>
+                <a:sym typeface="+mn-ea"/>
+              </a:rPr>
+            </a:br>
+            <a:r>
+              <a:rPr lang="en-US" altLang="en-US" b="1" dirty="0">
+                <a:solidFill>
+                  <a:schemeClr val="accent2">
+                    <a:lumMod val="75000"/>
+                  </a:schemeClr>
+                </a:solidFill>
+                <a:sym typeface="+mn-ea"/>
+              </a:rPr>
+              <a:t>Example 2</a:t>
+            </a:r>
+            <a:br>
+              <a:rPr lang="en-US" altLang="en-US" b="1" dirty="0">
+                <a:solidFill>
+                  <a:schemeClr val="accent2">
+                    <a:lumMod val="75000"/>
+                  </a:schemeClr>
+                </a:solidFill>
+                <a:sym typeface="+mn-ea"/>
+              </a:rPr>
+            </a:br>
+            <a:endParaRPr lang="en-US"/>
+          </a:p>
+        </p:txBody>
+      </p:sp>
+      <p:pic>
+        <p:nvPicPr>
+          <p:cNvPr id="4" name="Content Placeholder 3" descr="Image 01-02-2024 at 9.57 AM"/>
+          <p:cNvPicPr>
+            <a:picLocks noGrp="1" noChangeAspect="1"/>
+          </p:cNvPicPr>
+          <p:nvPr>
+            <p:ph idx="1"/>
+          </p:nvPr>
+        </p:nvPicPr>
+        <p:blipFill>
+          <a:blip r:embed="rId2"/>
+          <a:stretch>
+            <a:fillRect/>
+          </a:stretch>
+        </p:blipFill>
+        <p:spPr>
+          <a:xfrm>
+            <a:off x="1597025" y="1273175"/>
+            <a:ext cx="8808720" cy="5279390"/>
+          </a:xfrm>
+          <a:prstGeom prst="rect">
+            <a:avLst/>
+          </a:prstGeom>
+        </p:spPr>
+      </p:pic>
+    </p:spTree>
+  </p:cSld>
+  <p:clrMapOvr>
+    <a:masterClrMapping/>
+  </p:clrMapOvr>
+</p:sld>
+</file>
+
+<file path=ppt/slides/slide28.xml><?xml version="1.0" encoding="utf-8"?>
+<p:sld xmlns:a="http://schemas.openxmlformats.org/drawingml/2006/main" xmlns:r="http://schemas.openxmlformats.org/officeDocument/2006/relationships" xmlns:p="http://schemas.openxmlformats.org/presentationml/2006/main">
+  <p:cSld>
+    <p:spTree>
+      <p:nvGrpSpPr>
+        <p:cNvPr id="1" name=""/>
+        <p:cNvGrpSpPr/>
+        <p:nvPr/>
+      </p:nvGrpSpPr>
+      <p:grpSpPr>
+        <a:xfrm>
+          <a:off x="0" y="0"/>
+          <a:ext cx="0" cy="0"/>
+          <a:chOff x="0" y="0"/>
+          <a:chExt cx="0" cy="0"/>
+        </a:xfrm>
+      </p:grpSpPr>
+      <p:sp>
+        <p:nvSpPr>
+          <p:cNvPr id="4" name="Slide Number Placeholder 3">
+            <a:extLst>
+              <a:ext uri="{FF2B5EF4-FFF2-40B4-BE49-F238E27FC236}">
+                <a16:creationId xmlns:a16="http://schemas.microsoft.com/office/drawing/2014/main" id="{1AD59859-736C-7E27-9553-A5F2B0959ECB}"/>
+              </a:ext>
+            </a:extLst>
+          </p:cNvPr>
+          <p:cNvSpPr>
+            <a:spLocks noGrp="1"/>
+          </p:cNvSpPr>
+          <p:nvPr>
+            <p:ph type="sldNum" sz="quarter" idx="12"/>
+          </p:nvPr>
+        </p:nvSpPr>
+        <p:spPr/>
+        <p:txBody>
+          <a:bodyPr/>
+          <a:lstStyle/>
+          <a:p>
+            <a:fld id="{7D99BD73-FDD7-4E26-8496-E1839C5552C7}" type="slidenum">
+              <a:rPr lang="en-US" altLang="en-US"/>
+              <a:pPr/>
+              <a:t>28</a:t>
+            </a:fld>
+            <a:endParaRPr lang="en-US" altLang="en-US"/>
+          </a:p>
+        </p:txBody>
+      </p:sp>
+      <p:sp>
+        <p:nvSpPr>
+          <p:cNvPr id="369666" name="Rectangle 2">
+            <a:extLst>
+              <a:ext uri="{FF2B5EF4-FFF2-40B4-BE49-F238E27FC236}">
+                <a16:creationId xmlns:a16="http://schemas.microsoft.com/office/drawing/2014/main" id="{12750400-9C4B-1641-0376-3A3F500FEBDF}"/>
+              </a:ext>
+            </a:extLst>
+          </p:cNvPr>
+          <p:cNvSpPr>
+            <a:spLocks noGrp="1" noChangeArrowheads="1"/>
+          </p:cNvSpPr>
+          <p:nvPr>
+            <p:ph type="title"/>
+          </p:nvPr>
+        </p:nvSpPr>
+        <p:spPr/>
+        <p:txBody>
+          <a:bodyPr/>
+          <a:lstStyle/>
+          <a:p>
+            <a:pPr algn="ctr"/>
+            <a:r>
+              <a:rPr lang="en-US" altLang="en-US"/>
+              <a:t>PLUS Operation (</a:t>
+            </a:r>
+            <a:r>
+              <a:rPr lang="en-US" altLang="en-US" baseline="30000"/>
+              <a:t>+</a:t>
+            </a:r>
+            <a:r>
+              <a:rPr lang="en-US" altLang="en-US"/>
+              <a:t>)</a:t>
+            </a:r>
+          </a:p>
+        </p:txBody>
+      </p:sp>
+      <p:sp>
+        <p:nvSpPr>
+          <p:cNvPr id="369667" name="Rectangle 3">
+            <a:extLst>
+              <a:ext uri="{FF2B5EF4-FFF2-40B4-BE49-F238E27FC236}">
+                <a16:creationId xmlns:a16="http://schemas.microsoft.com/office/drawing/2014/main" id="{D9B053BE-FF25-16FE-70C2-75E0A43F847E}"/>
+              </a:ext>
+            </a:extLst>
+          </p:cNvPr>
+          <p:cNvSpPr>
+            <a:spLocks noGrp="1" noChangeArrowheads="1"/>
+          </p:cNvSpPr>
+          <p:nvPr>
+            <p:ph type="body" idx="1"/>
+          </p:nvPr>
+        </p:nvSpPr>
+        <p:spPr/>
+        <p:txBody>
+          <a:bodyPr/>
+          <a:lstStyle/>
+          <a:p>
+            <a:r>
+              <a:rPr lang="en-US" altLang="en-US"/>
+              <a:t>Plus Operation is same as Kleene Star Closure except that it does not generate  </a:t>
+            </a:r>
+            <a:r>
+              <a:rPr lang="el-GR" altLang="en-US"/>
+              <a:t>Λ (null string)</a:t>
+            </a:r>
+            <a:r>
+              <a:rPr lang="en-US" altLang="en-US"/>
+              <a:t>, automatically. </a:t>
+            </a:r>
+          </a:p>
+          <a:p>
+            <a:pPr>
+              <a:buFont typeface="Monotype Sorts" pitchFamily="2" charset="2"/>
+              <a:buNone/>
+            </a:pPr>
+            <a:r>
+              <a:rPr lang="en-US" altLang="en-US"/>
+              <a:t>Example:</a:t>
+            </a:r>
+          </a:p>
+          <a:p>
+            <a:r>
+              <a:rPr lang="en-US" altLang="en-US"/>
+              <a:t> If </a:t>
+            </a:r>
+            <a:r>
+              <a:rPr lang="el-GR" altLang="en-US"/>
+              <a:t>Σ</a:t>
+            </a:r>
+            <a:r>
+              <a:rPr lang="en-US" altLang="en-US"/>
+              <a:t> = {0,1} </a:t>
+            </a:r>
+          </a:p>
+          <a:p>
+            <a:pPr>
+              <a:buFont typeface="Monotype Sorts" pitchFamily="2" charset="2"/>
+              <a:buNone/>
+            </a:pPr>
+            <a:r>
+              <a:rPr lang="en-US" altLang="en-US"/>
+              <a:t>	Then </a:t>
+            </a:r>
+            <a:r>
+              <a:rPr lang="el-GR" altLang="en-US"/>
+              <a:t>Σ</a:t>
+            </a:r>
+            <a:r>
+              <a:rPr lang="en-US" altLang="en-US" baseline="40000"/>
+              <a:t>+</a:t>
+            </a:r>
+            <a:r>
+              <a:rPr lang="en-US" altLang="en-US"/>
+              <a:t> = {0, 1, 00, 01, 10, 11, ….}</a:t>
+            </a:r>
+          </a:p>
+          <a:p>
+            <a:r>
+              <a:rPr lang="en-US" altLang="en-US"/>
+              <a:t>If </a:t>
+            </a:r>
+            <a:r>
+              <a:rPr lang="el-GR" altLang="en-US"/>
+              <a:t>Σ</a:t>
+            </a:r>
+            <a:r>
+              <a:rPr lang="en-US" altLang="en-US"/>
+              <a:t> = {aab, c} </a:t>
+            </a:r>
+          </a:p>
+          <a:p>
+            <a:pPr>
+              <a:buFont typeface="Monotype Sorts" pitchFamily="2" charset="2"/>
+              <a:buNone/>
+            </a:pPr>
+            <a:r>
+              <a:rPr lang="en-US" altLang="en-US"/>
+              <a:t>	Then </a:t>
+            </a:r>
+            <a:r>
+              <a:rPr lang="el-GR" altLang="en-US"/>
+              <a:t>Σ</a:t>
+            </a:r>
+            <a:r>
+              <a:rPr lang="en-US" altLang="en-US" baseline="40000"/>
+              <a:t>+</a:t>
+            </a:r>
+            <a:r>
+              <a:rPr lang="en-US" altLang="en-US"/>
+              <a:t> = {aab, c, aabaab, aabc, caab, cc, ….}</a:t>
+            </a:r>
+            <a:endParaRPr lang="el-GR" altLang="en-US"/>
+          </a:p>
+          <a:p>
+            <a:pPr>
+              <a:buFont typeface="Monotype Sorts" pitchFamily="2" charset="2"/>
+              <a:buNone/>
+            </a:pPr>
+            <a:endParaRPr lang="el-GR" altLang="en-US"/>
+          </a:p>
+        </p:txBody>
+      </p:sp>
+    </p:spTree>
+  </p:cSld>
+  <p:clrMapOvr>
+    <a:masterClrMapping/>
+  </p:clrMapOvr>
+</p:sld>
+</file>
+
+<file path=ppt/slides/slide29.xml><?xml version="1.0" encoding="utf-8"?>
+<p:sld xmlns:a="http://schemas.openxmlformats.org/drawingml/2006/main" xmlns:r="http://schemas.openxmlformats.org/officeDocument/2006/relationships" xmlns:p="http://schemas.openxmlformats.org/presentationml/2006/main">
+  <p:cSld>
+    <p:spTree>
+      <p:nvGrpSpPr>
+        <p:cNvPr id="1" name=""/>
+        <p:cNvGrpSpPr/>
+        <p:nvPr/>
+      </p:nvGrpSpPr>
+      <p:grpSpPr>
+        <a:xfrm>
+          <a:off x="0" y="0"/>
+          <a:ext cx="0" cy="0"/>
+          <a:chOff x="0" y="0"/>
+          <a:chExt cx="0" cy="0"/>
+        </a:xfrm>
+      </p:grpSpPr>
+      <p:sp>
+        <p:nvSpPr>
+          <p:cNvPr id="4" name="Slide Number Placeholder 3">
+            <a:extLst>
+              <a:ext uri="{FF2B5EF4-FFF2-40B4-BE49-F238E27FC236}">
+                <a16:creationId xmlns:a16="http://schemas.microsoft.com/office/drawing/2014/main" id="{1D31C58F-2BB3-27FC-D198-1FBB9F865DFC}"/>
+              </a:ext>
+            </a:extLst>
+          </p:cNvPr>
+          <p:cNvSpPr>
+            <a:spLocks noGrp="1"/>
+          </p:cNvSpPr>
+          <p:nvPr>
+            <p:ph type="sldNum" sz="quarter" idx="12"/>
+          </p:nvPr>
+        </p:nvSpPr>
+        <p:spPr/>
+        <p:txBody>
+          <a:bodyPr/>
+          <a:lstStyle/>
+          <a:p>
+            <a:fld id="{9777716F-E2D9-486A-957C-6AD572878639}" type="slidenum">
+              <a:rPr lang="en-US" altLang="en-US"/>
+              <a:pPr/>
+              <a:t>29</a:t>
+            </a:fld>
+            <a:endParaRPr lang="en-US" altLang="en-US"/>
+          </a:p>
+        </p:txBody>
+      </p:sp>
+      <p:sp>
+        <p:nvSpPr>
+          <p:cNvPr id="370690" name="Rectangle 1026">
+            <a:extLst>
+              <a:ext uri="{FF2B5EF4-FFF2-40B4-BE49-F238E27FC236}">
+                <a16:creationId xmlns:a16="http://schemas.microsoft.com/office/drawing/2014/main" id="{CB348DAB-1BB2-E751-3753-FB8C2C01707A}"/>
+              </a:ext>
+            </a:extLst>
+          </p:cNvPr>
+          <p:cNvSpPr>
+            <a:spLocks noGrp="1" noChangeArrowheads="1"/>
+          </p:cNvSpPr>
+          <p:nvPr>
+            <p:ph type="title"/>
+          </p:nvPr>
+        </p:nvSpPr>
+        <p:spPr/>
+        <p:txBody>
+          <a:bodyPr/>
+          <a:lstStyle/>
+          <a:p>
+            <a:pPr algn="ctr"/>
+            <a:r>
+              <a:rPr lang="en-US" altLang="en-US"/>
+              <a:t>TASK</a:t>
+            </a:r>
+          </a:p>
+        </p:txBody>
+      </p:sp>
+      <p:sp>
+        <p:nvSpPr>
+          <p:cNvPr id="370691" name="Rectangle 1027">
+            <a:extLst>
+              <a:ext uri="{FF2B5EF4-FFF2-40B4-BE49-F238E27FC236}">
+                <a16:creationId xmlns:a16="http://schemas.microsoft.com/office/drawing/2014/main" id="{C8EB85F5-F3B4-BD72-281C-87A83FC94B1F}"/>
+              </a:ext>
+            </a:extLst>
+          </p:cNvPr>
+          <p:cNvSpPr>
+            <a:spLocks noGrp="1" noChangeArrowheads="1"/>
+          </p:cNvSpPr>
+          <p:nvPr>
+            <p:ph type="body" idx="1"/>
+          </p:nvPr>
+        </p:nvSpPr>
+        <p:spPr/>
+        <p:txBody>
+          <a:bodyPr/>
+          <a:lstStyle/>
+          <a:p>
+            <a:pPr marL="577850" indent="-577850">
+              <a:buNone/>
+            </a:pPr>
+            <a:r>
+              <a:rPr lang="en-US" altLang="en-US" sz="3000"/>
+              <a:t>Q1)Is there any case when S</a:t>
+            </a:r>
+            <a:r>
+              <a:rPr lang="en-US" altLang="en-US" sz="3000" baseline="40000"/>
+              <a:t>+ </a:t>
+            </a:r>
+            <a:r>
+              <a:rPr lang="en-US" altLang="en-US" sz="3000"/>
+              <a:t>contains </a:t>
+            </a:r>
+            <a:r>
+              <a:rPr lang="el-GR" altLang="en-US" sz="3000"/>
+              <a:t>Λ</a:t>
+            </a:r>
+            <a:r>
+              <a:rPr lang="en-US" altLang="en-US" sz="3000"/>
+              <a:t>? If yes then justify your answer. </a:t>
+            </a:r>
+          </a:p>
+          <a:p>
+            <a:pPr marL="577850" indent="-577850"/>
+            <a:endParaRPr lang="en-US" altLang="en-US" sz="3000"/>
+          </a:p>
+          <a:p>
+            <a:pPr marL="577850" indent="-577850">
+              <a:buNone/>
+            </a:pPr>
+            <a:r>
+              <a:rPr lang="en-US" altLang="en-US" sz="3000"/>
+              <a:t>Q2) Prove that for any set of strings S</a:t>
+            </a:r>
+          </a:p>
+          <a:p>
+            <a:pPr marL="577850" indent="-577850">
+              <a:buNone/>
+            </a:pPr>
+            <a:endParaRPr lang="en-US" altLang="en-US" sz="3000"/>
+          </a:p>
+          <a:p>
+            <a:pPr marL="577850" indent="-577850">
+              <a:buFont typeface="Monotype Sorts" pitchFamily="2" charset="2"/>
+              <a:buAutoNum type="romanLcPeriod"/>
+            </a:pPr>
+            <a:r>
+              <a:rPr lang="en-US" altLang="en-US" sz="3000"/>
+              <a:t>(S</a:t>
+            </a:r>
+            <a:r>
+              <a:rPr lang="en-US" altLang="en-US" sz="3000" baseline="40000"/>
+              <a:t>+</a:t>
+            </a:r>
+            <a:r>
+              <a:rPr lang="en-US" altLang="en-US" sz="3000"/>
+              <a:t>)</a:t>
+            </a:r>
+            <a:r>
+              <a:rPr lang="en-US" altLang="en-US" sz="3000" baseline="30000"/>
+              <a:t>*</a:t>
+            </a:r>
+            <a:r>
+              <a:rPr lang="en-US" altLang="en-US" sz="3000"/>
+              <a:t>=(S</a:t>
+            </a:r>
+            <a:r>
+              <a:rPr lang="en-US" altLang="en-US" sz="3000" baseline="30000"/>
+              <a:t>*</a:t>
+            </a:r>
+            <a:r>
+              <a:rPr lang="en-US" altLang="en-US" sz="3000"/>
+              <a:t>)</a:t>
+            </a:r>
+            <a:r>
+              <a:rPr lang="en-US" altLang="en-US" sz="3000" baseline="30000"/>
+              <a:t>*</a:t>
+            </a:r>
+            <a:endParaRPr lang="en-US" altLang="en-US" sz="3000"/>
+          </a:p>
+          <a:p>
+            <a:pPr marL="577850" indent="-577850">
+              <a:buFont typeface="Monotype Sorts" pitchFamily="2" charset="2"/>
+              <a:buAutoNum type="romanLcPeriod"/>
+            </a:pPr>
+            <a:r>
+              <a:rPr lang="en-US" altLang="en-US" sz="3000"/>
+              <a:t>(S</a:t>
+            </a:r>
+            <a:r>
+              <a:rPr lang="en-US" altLang="en-US" sz="3000" baseline="40000"/>
+              <a:t>+</a:t>
+            </a:r>
+            <a:r>
+              <a:rPr lang="en-US" altLang="en-US" sz="3000"/>
+              <a:t>)</a:t>
+            </a:r>
+            <a:r>
+              <a:rPr lang="en-US" altLang="en-US" sz="3000" baseline="40000"/>
+              <a:t>+</a:t>
+            </a:r>
+            <a:r>
+              <a:rPr lang="en-US" altLang="en-US" sz="3000"/>
+              <a:t>=S</a:t>
+            </a:r>
+            <a:r>
+              <a:rPr lang="en-US" altLang="en-US" sz="3000" baseline="40000"/>
+              <a:t>+</a:t>
+            </a:r>
+            <a:endParaRPr lang="en-US" altLang="en-US" sz="3000" baseline="30000"/>
+          </a:p>
+          <a:p>
+            <a:pPr marL="577850" indent="-577850">
+              <a:buFont typeface="Monotype Sorts" pitchFamily="2" charset="2"/>
+              <a:buAutoNum type="romanLcPeriod"/>
+            </a:pPr>
+            <a:r>
+              <a:rPr lang="en-US" altLang="en-US" sz="3000"/>
+              <a:t>Is (S</a:t>
+            </a:r>
+            <a:r>
+              <a:rPr lang="en-US" altLang="en-US" sz="3000" baseline="40000"/>
+              <a:t>*</a:t>
+            </a:r>
+            <a:r>
+              <a:rPr lang="en-US" altLang="en-US" sz="3000"/>
+              <a:t>)</a:t>
+            </a:r>
+            <a:r>
+              <a:rPr lang="en-US" altLang="en-US" sz="3000" baseline="40000"/>
+              <a:t>+</a:t>
+            </a:r>
+            <a:r>
+              <a:rPr lang="en-US" altLang="en-US" sz="3000"/>
+              <a:t>=(S</a:t>
+            </a:r>
+            <a:r>
+              <a:rPr lang="en-US" altLang="en-US" sz="3000" baseline="40000"/>
+              <a:t>+</a:t>
+            </a:r>
+            <a:r>
+              <a:rPr lang="en-US" altLang="en-US" sz="3000"/>
+              <a:t>)</a:t>
+            </a:r>
+            <a:r>
+              <a:rPr lang="en-US" altLang="en-US" sz="3000" baseline="40000"/>
+              <a:t>*</a:t>
+            </a:r>
+            <a:endParaRPr lang="el-GR" altLang="en-US" sz="3000" baseline="40000"/>
+          </a:p>
+        </p:txBody>
+      </p:sp>
+    </p:spTree>
+  </p:cSld>
+  <p:clrMapOvr>
+    <a:masterClrMapping/>
+  </p:clrMapOvr>
+</p:sld>
+</file>
+
+<file path=ppt/slides/slide3.xml><?xml version="1.0" encoding="utf-8"?>
+<p:sld xmlns:a="http://schemas.openxmlformats.org/drawingml/2006/main" xmlns:r="http://schemas.openxmlformats.org/officeDocument/2006/relationships" xmlns:p="http://schemas.openxmlformats.org/presentationml/2006/main">
+  <p:cSld>
+    <p:spTree>
+      <p:nvGrpSpPr>
+        <p:cNvPr id="1" name=""/>
+        <p:cNvGrpSpPr/>
+        <p:nvPr/>
+      </p:nvGrpSpPr>
+      <p:grpSpPr>
+        <a:xfrm>
+          <a:off x="0" y="0"/>
+          <a:ext cx="0" cy="0"/>
+          <a:chOff x="0" y="0"/>
+          <a:chExt cx="0" cy="0"/>
+        </a:xfrm>
+      </p:grpSpPr>
+      <p:sp>
+        <p:nvSpPr>
+          <p:cNvPr id="2" name="Title 1"/>
+          <p:cNvSpPr>
+            <a:spLocks noGrp="1"/>
+          </p:cNvSpPr>
+          <p:nvPr>
+            <p:ph type="ctrTitle"/>
+          </p:nvPr>
+        </p:nvSpPr>
+        <p:spPr/>
+        <p:txBody>
+          <a:bodyPr>
+            <a:normAutofit/>
+          </a:bodyPr>
+          <a:lstStyle/>
+          <a:p>
+            <a:r>
+              <a:rPr lang="en-US" dirty="0"/>
+              <a:t> </a:t>
+            </a:r>
+            <a:r>
+              <a:rPr lang="en-US" dirty="0">
+                <a:sym typeface="+mn-ea"/>
+              </a:rPr>
+              <a:t>Theory of Automata</a:t>
+            </a:r>
+            <a:r>
+              <a:rPr lang="en-US" dirty="0"/>
+              <a:t> Course</a:t>
+            </a:r>
+          </a:p>
+        </p:txBody>
+      </p:sp>
+      <p:sp>
+        <p:nvSpPr>
+          <p:cNvPr id="3" name="Subtitle 2"/>
+          <p:cNvSpPr>
+            <a:spLocks noGrp="1"/>
+          </p:cNvSpPr>
+          <p:nvPr>
+            <p:ph type="subTitle" idx="1"/>
+          </p:nvPr>
+        </p:nvSpPr>
+        <p:spPr/>
+        <p:txBody>
+          <a:bodyPr/>
+          <a:lstStyle/>
+          <a:p>
+            <a:r>
+              <a:rPr lang="en-US" dirty="0"/>
+              <a:t>Lecture 2</a:t>
+            </a:r>
+          </a:p>
+        </p:txBody>
+      </p:sp>
+    </p:spTree>
+  </p:cSld>
+  <p:clrMapOvr>
+    <a:masterClrMapping/>
+  </p:clrMapOvr>
+</p:sld>
+</file>
+
+<file path=ppt/slides/slide30.xml><?xml version="1.0" encoding="utf-8"?>
+<p:sld xmlns:a="http://schemas.openxmlformats.org/drawingml/2006/main" xmlns:r="http://schemas.openxmlformats.org/officeDocument/2006/relationships" xmlns:p="http://schemas.openxmlformats.org/presentationml/2006/main">
+  <p:cSld>
+    <p:spTree>
+      <p:nvGrpSpPr>
+        <p:cNvPr id="1" name=""/>
+        <p:cNvGrpSpPr/>
+        <p:nvPr/>
+      </p:nvGrpSpPr>
+      <p:grpSpPr>
+        <a:xfrm>
+          <a:off x="0" y="0"/>
+          <a:ext cx="0" cy="0"/>
+          <a:chOff x="0" y="0"/>
+          <a:chExt cx="0" cy="0"/>
+        </a:xfrm>
+      </p:grpSpPr>
+      <p:sp>
+        <p:nvSpPr>
+          <p:cNvPr id="4" name="Slide Number Placeholder 3">
+            <a:extLst>
+              <a:ext uri="{FF2B5EF4-FFF2-40B4-BE49-F238E27FC236}">
+                <a16:creationId xmlns:a16="http://schemas.microsoft.com/office/drawing/2014/main" id="{49F5D578-DB30-97D1-B385-F9E5EB61352C}"/>
+              </a:ext>
+            </a:extLst>
+          </p:cNvPr>
+          <p:cNvSpPr>
+            <a:spLocks noGrp="1"/>
+          </p:cNvSpPr>
+          <p:nvPr>
+            <p:ph type="sldNum" sz="quarter" idx="12"/>
+          </p:nvPr>
+        </p:nvSpPr>
+        <p:spPr/>
+        <p:txBody>
+          <a:bodyPr/>
+          <a:lstStyle/>
+          <a:p>
+            <a:fld id="{2333D274-A994-4D01-B89C-DBC9A1996C1A}" type="slidenum">
+              <a:rPr lang="en-US" altLang="en-US"/>
+              <a:pPr/>
+              <a:t>30</a:t>
+            </a:fld>
+            <a:endParaRPr lang="en-US" altLang="en-US"/>
+          </a:p>
+        </p:txBody>
+      </p:sp>
+      <p:sp>
+        <p:nvSpPr>
+          <p:cNvPr id="373762" name="Rectangle 1026">
+            <a:extLst>
+              <a:ext uri="{FF2B5EF4-FFF2-40B4-BE49-F238E27FC236}">
+                <a16:creationId xmlns:a16="http://schemas.microsoft.com/office/drawing/2014/main" id="{1EF001D6-F92B-E3BF-D39D-B6E5DBB984C2}"/>
+              </a:ext>
+            </a:extLst>
+          </p:cNvPr>
+          <p:cNvSpPr>
+            <a:spLocks noGrp="1" noChangeArrowheads="1"/>
+          </p:cNvSpPr>
+          <p:nvPr>
+            <p:ph type="title"/>
+          </p:nvPr>
+        </p:nvSpPr>
+        <p:spPr/>
+        <p:txBody>
+          <a:bodyPr/>
+          <a:lstStyle/>
+          <a:p>
+            <a:pPr algn="ctr"/>
+            <a:r>
+              <a:rPr lang="en-US" altLang="en-US"/>
+              <a:t>Remark</a:t>
+            </a:r>
+          </a:p>
+        </p:txBody>
+      </p:sp>
+      <p:sp>
+        <p:nvSpPr>
+          <p:cNvPr id="373763" name="Rectangle 1027">
+            <a:extLst>
+              <a:ext uri="{FF2B5EF4-FFF2-40B4-BE49-F238E27FC236}">
+                <a16:creationId xmlns:a16="http://schemas.microsoft.com/office/drawing/2014/main" id="{BC90B5F2-3E4C-3DAB-0C0C-3791E9B3FC7B}"/>
+              </a:ext>
+            </a:extLst>
+          </p:cNvPr>
+          <p:cNvSpPr>
+            <a:spLocks noGrp="1" noChangeArrowheads="1"/>
+          </p:cNvSpPr>
+          <p:nvPr>
+            <p:ph type="body" idx="1"/>
+          </p:nvPr>
+        </p:nvSpPr>
+        <p:spPr/>
+        <p:txBody>
+          <a:bodyPr/>
+          <a:lstStyle/>
+          <a:p>
+            <a:pPr>
+              <a:lnSpc>
+                <a:spcPct val="90000"/>
+              </a:lnSpc>
+            </a:pPr>
+            <a:r>
+              <a:rPr lang="en-US" altLang="en-US"/>
+              <a:t>It is to be noted that Kleene Star can also be operated on any string </a:t>
+            </a:r>
+            <a:r>
+              <a:rPr lang="en-US" altLang="en-US" i="1"/>
+              <a:t>i.e. </a:t>
+            </a:r>
+            <a:r>
+              <a:rPr lang="en-US" altLang="en-US"/>
+              <a:t>a</a:t>
+            </a:r>
+            <a:r>
+              <a:rPr lang="en-US" altLang="en-US" baseline="40000"/>
+              <a:t>* </a:t>
+            </a:r>
+            <a:r>
+              <a:rPr lang="en-US" altLang="en-US"/>
+              <a:t>can be considered to be all possible strings defined over {a}, which shows that a</a:t>
+            </a:r>
+            <a:r>
+              <a:rPr lang="en-US" altLang="en-US" baseline="40000"/>
+              <a:t>*</a:t>
+            </a:r>
+            <a:r>
+              <a:rPr lang="en-US" altLang="en-US"/>
+              <a:t> generates </a:t>
+            </a:r>
+          </a:p>
+          <a:p>
+            <a:pPr>
+              <a:lnSpc>
+                <a:spcPct val="90000"/>
+              </a:lnSpc>
+              <a:buFont typeface="Monotype Sorts" pitchFamily="2" charset="2"/>
+              <a:buNone/>
+            </a:pPr>
+            <a:r>
+              <a:rPr lang="en-US" altLang="en-US"/>
+              <a:t>	 </a:t>
+            </a:r>
+            <a:r>
+              <a:rPr lang="el-GR" altLang="en-US" sz="3000"/>
+              <a:t>Λ</a:t>
+            </a:r>
+            <a:r>
+              <a:rPr lang="en-US" altLang="en-US" sz="3000"/>
+              <a:t>, a, aa, aaa, …</a:t>
+            </a:r>
+          </a:p>
+          <a:p>
+            <a:pPr>
+              <a:lnSpc>
+                <a:spcPct val="90000"/>
+              </a:lnSpc>
+              <a:buFont typeface="Monotype Sorts" pitchFamily="2" charset="2"/>
+              <a:buNone/>
+            </a:pPr>
+            <a:r>
+              <a:rPr lang="en-US" altLang="en-US" sz="3000"/>
+              <a:t>It may also be noted that a</a:t>
+            </a:r>
+            <a:r>
+              <a:rPr lang="en-US" altLang="en-US" baseline="40000"/>
+              <a:t>+</a:t>
+            </a:r>
+            <a:r>
+              <a:rPr lang="en-US" altLang="en-US"/>
+              <a:t> can be considered to be all possible non empty strings defined over {a}, which shows that a</a:t>
+            </a:r>
+            <a:r>
+              <a:rPr lang="en-US" altLang="en-US" baseline="40000"/>
+              <a:t>+</a:t>
+            </a:r>
+            <a:r>
+              <a:rPr lang="en-US" altLang="en-US"/>
+              <a:t> generates </a:t>
+            </a:r>
+          </a:p>
+          <a:p>
+            <a:pPr>
+              <a:lnSpc>
+                <a:spcPct val="90000"/>
+              </a:lnSpc>
+              <a:buFont typeface="Monotype Sorts" pitchFamily="2" charset="2"/>
+              <a:buNone/>
+            </a:pPr>
+            <a:r>
+              <a:rPr lang="en-US" altLang="en-US"/>
+              <a:t>	</a:t>
+            </a:r>
+            <a:r>
+              <a:rPr lang="en-US" altLang="en-US" sz="3000"/>
+              <a:t> a, aa, aaa, aaaa, …</a:t>
+            </a:r>
+          </a:p>
+        </p:txBody>
+      </p:sp>
+    </p:spTree>
+  </p:cSld>
+  <p:clrMapOvr>
+    <a:masterClrMapping/>
+  </p:clrMapOvr>
+</p:sld>
+</file>
+
+<file path=ppt/slides/slide31.xml><?xml version="1.0" encoding="utf-8"?>
+<p:sld xmlns:a="http://schemas.openxmlformats.org/drawingml/2006/main" xmlns:r="http://schemas.openxmlformats.org/officeDocument/2006/relationships" xmlns:p="http://schemas.openxmlformats.org/presentationml/2006/main">
+  <p:cSld>
+    <p:spTree>
+      <p:nvGrpSpPr>
+        <p:cNvPr id="1" name=""/>
+        <p:cNvGrpSpPr/>
+        <p:nvPr/>
+      </p:nvGrpSpPr>
+      <p:grpSpPr>
+        <a:xfrm>
+          <a:off x="0" y="0"/>
+          <a:ext cx="0" cy="0"/>
+          <a:chOff x="0" y="0"/>
+          <a:chExt cx="0" cy="0"/>
+        </a:xfrm>
+      </p:grpSpPr>
+      <p:sp>
+        <p:nvSpPr>
+          <p:cNvPr id="3" name="Content Placeholder 2"/>
+          <p:cNvSpPr>
+            <a:spLocks noGrp="1"/>
+          </p:cNvSpPr>
+          <p:nvPr>
+            <p:ph idx="1"/>
+          </p:nvPr>
+        </p:nvSpPr>
+        <p:spPr>
+          <a:xfrm>
+            <a:off x="3728085" y="2772410"/>
+            <a:ext cx="5715635" cy="793115"/>
+          </a:xfrm>
+        </p:spPr>
+        <p:txBody>
+          <a:bodyPr/>
+          <a:lstStyle/>
+          <a:p>
+            <a:pPr marL="0" indent="0" algn="ctr">
+              <a:buNone/>
+            </a:pPr>
+            <a:r>
+              <a:rPr lang="en-US" sz="3600" b="1"/>
+              <a:t>End of Lecture</a:t>
+            </a:r>
+          </a:p>
+        </p:txBody>
+      </p:sp>
+    </p:spTree>
+  </p:cSld>
+  <p:clrMapOvr>
+    <a:masterClrMapping/>
+  </p:clrMapOvr>
+</p:sld>
+</file>
+
+<file path=ppt/slides/slide4.xml><?xml version="1.0" encoding="utf-8"?>
+<p:sld xmlns:a="http://schemas.openxmlformats.org/drawingml/2006/main" xmlns:r="http://schemas.openxmlformats.org/officeDocument/2006/relationships" xmlns:p="http://schemas.openxmlformats.org/presentationml/2006/main">
+  <p:cSld>
+    <p:spTree>
+      <p:nvGrpSpPr>
+        <p:cNvPr id="1" name=""/>
+        <p:cNvGrpSpPr/>
+        <p:nvPr/>
+      </p:nvGrpSpPr>
+      <p:grpSpPr>
+        <a:xfrm>
+          <a:off x="0" y="0"/>
+          <a:ext cx="0" cy="0"/>
+          <a:chOff x="0" y="0"/>
+          <a:chExt cx="0" cy="0"/>
+        </a:xfrm>
+      </p:grpSpPr>
+      <p:sp>
+        <p:nvSpPr>
+          <p:cNvPr id="3" name="Content Placeholder 2"/>
+          <p:cNvSpPr>
+            <a:spLocks noGrp="1"/>
+          </p:cNvSpPr>
+          <p:nvPr>
+            <p:ph idx="1"/>
+          </p:nvPr>
+        </p:nvSpPr>
+        <p:spPr>
+          <a:xfrm>
+            <a:off x="838200" y="2039815"/>
+            <a:ext cx="10515600" cy="3376247"/>
+          </a:xfrm>
+        </p:spPr>
+        <p:txBody>
+          <a:bodyPr/>
+          <a:lstStyle/>
+          <a:p>
+            <a:pPr marL="0" indent="0" algn="ctr">
+              <a:buNone/>
+            </a:pPr>
+            <a:r>
+              <a:rPr lang="en-US" sz="5400" dirty="0">
+                <a:latin typeface="Algerian" panose="04020705040A02060702" pitchFamily="82" charset="0"/>
+              </a:rPr>
+              <a:t>CHAPTER 2 - Languages</a:t>
+            </a:r>
+          </a:p>
+          <a:p>
+            <a:pPr marL="0" indent="0" algn="ctr">
+              <a:buNone/>
+            </a:pPr>
+            <a:r>
+              <a:rPr lang="en-US" sz="3200"/>
+              <a:t>Overview</a:t>
+            </a:r>
+            <a:endParaRPr lang="en-US" sz="3200" dirty="0"/>
+          </a:p>
+        </p:txBody>
+      </p:sp>
+    </p:spTree>
+  </p:cSld>
+  <p:clrMapOvr>
+    <a:masterClrMapping/>
+  </p:clrMapOvr>
+</p:sld>
+</file>
+
+<file path=ppt/slides/slide5.xml><?xml version="1.0" encoding="utf-8"?>
+<p:sld xmlns:a="http://schemas.openxmlformats.org/drawingml/2006/main" xmlns:r="http://schemas.openxmlformats.org/officeDocument/2006/relationships" xmlns:p="http://schemas.openxmlformats.org/presentationml/2006/main">
+  <p:cSld>
+    <p:spTree>
+      <p:nvGrpSpPr>
+        <p:cNvPr id="1" name=""/>
+        <p:cNvGrpSpPr/>
+        <p:nvPr/>
+      </p:nvGrpSpPr>
+      <p:grpSpPr>
+        <a:xfrm>
+          <a:off x="0" y="0"/>
+          <a:ext cx="0" cy="0"/>
+          <a:chOff x="0" y="0"/>
+          <a:chExt cx="0" cy="0"/>
+        </a:xfrm>
+      </p:grpSpPr>
+      <p:sp>
+        <p:nvSpPr>
+          <p:cNvPr id="2" name="Title 1"/>
+          <p:cNvSpPr>
+            <a:spLocks noGrp="1"/>
+          </p:cNvSpPr>
+          <p:nvPr>
+            <p:ph type="title"/>
+          </p:nvPr>
+        </p:nvSpPr>
+        <p:spPr>
+          <a:xfrm>
+            <a:off x="838200" y="641985"/>
+            <a:ext cx="10515600" cy="527050"/>
+          </a:xfrm>
+        </p:spPr>
+        <p:txBody>
+          <a:bodyPr>
+            <a:normAutofit fontScale="90000"/>
+          </a:bodyPr>
+          <a:lstStyle/>
+          <a:p>
+            <a:r>
+              <a:rPr lang="en-US" altLang="en-US" b="1" dirty="0">
+                <a:solidFill>
+                  <a:schemeClr val="accent2">
+                    <a:lumMod val="75000"/>
+                  </a:schemeClr>
+                </a:solidFill>
+                <a:sym typeface="+mn-ea"/>
+              </a:rPr>
+              <a:t>Language</a:t>
+            </a:r>
+            <a:endParaRPr lang="en-US"/>
+          </a:p>
+        </p:txBody>
+      </p:sp>
+      <p:pic>
+        <p:nvPicPr>
+          <p:cNvPr id="4" name="Content Placeholder 3" descr="Image 29-01-2024 at 11.29 PM"/>
+          <p:cNvPicPr>
+            <a:picLocks noGrp="1" noChangeAspect="1"/>
+          </p:cNvPicPr>
+          <p:nvPr>
+            <p:ph idx="1"/>
+          </p:nvPr>
+        </p:nvPicPr>
+        <p:blipFill>
+          <a:blip r:embed="rId2"/>
+          <a:stretch>
+            <a:fillRect/>
+          </a:stretch>
+        </p:blipFill>
+        <p:spPr>
+          <a:xfrm>
+            <a:off x="838200" y="1777365"/>
+            <a:ext cx="10678795" cy="2831465"/>
+          </a:xfrm>
+          <a:prstGeom prst="rect">
+            <a:avLst/>
+          </a:prstGeom>
+        </p:spPr>
+      </p:pic>
+    </p:spTree>
+  </p:cSld>
+  <p:clrMapOvr>
+    <a:masterClrMapping/>
+  </p:clrMapOvr>
+</p:sld>
+</file>
+
+<file path=ppt/slides/slide6.xml><?xml version="1.0" encoding="utf-8"?>
+<p:sld xmlns:a="http://schemas.openxmlformats.org/drawingml/2006/main" xmlns:r="http://schemas.openxmlformats.org/officeDocument/2006/relationships" xmlns:p="http://schemas.openxmlformats.org/presentationml/2006/main">
+  <p:cSld>
+    <p:spTree>
+      <p:nvGrpSpPr>
+        <p:cNvPr id="1" name=""/>
+        <p:cNvGrpSpPr/>
+        <p:nvPr/>
+      </p:nvGrpSpPr>
+      <p:grpSpPr>
+        <a:xfrm>
+          <a:off x="0" y="0"/>
+          <a:ext cx="0" cy="0"/>
+          <a:chOff x="0" y="0"/>
+          <a:chExt cx="0" cy="0"/>
+        </a:xfrm>
+      </p:grpSpPr>
+      <p:sp>
+        <p:nvSpPr>
+          <p:cNvPr id="2" name="Title 1">
+            <a:extLst>
+              <a:ext uri="{FF2B5EF4-FFF2-40B4-BE49-F238E27FC236}">
+                <a16:creationId xmlns:a16="http://schemas.microsoft.com/office/drawing/2014/main" id="{F495E297-89EE-2EF5-C070-57B29A17A509}"/>
+              </a:ext>
+            </a:extLst>
+          </p:cNvPr>
+          <p:cNvSpPr>
+            <a:spLocks noGrp="1"/>
+          </p:cNvSpPr>
+          <p:nvPr>
+            <p:ph type="title"/>
+          </p:nvPr>
+        </p:nvSpPr>
+        <p:spPr/>
+        <p:txBody>
+          <a:bodyPr/>
+          <a:lstStyle/>
+          <a:p>
+            <a:r>
+              <a:rPr lang="en-US" dirty="0"/>
+              <a:t>Language</a:t>
+            </a:r>
+          </a:p>
+        </p:txBody>
+      </p:sp>
+      <p:sp>
+        <p:nvSpPr>
+          <p:cNvPr id="3" name="Content Placeholder 2">
+            <a:extLst>
+              <a:ext uri="{FF2B5EF4-FFF2-40B4-BE49-F238E27FC236}">
+                <a16:creationId xmlns:a16="http://schemas.microsoft.com/office/drawing/2014/main" id="{51596D27-794B-B523-789B-7409B98B716D}"/>
+              </a:ext>
+            </a:extLst>
+          </p:cNvPr>
+          <p:cNvSpPr>
+            <a:spLocks noGrp="1"/>
+          </p:cNvSpPr>
+          <p:nvPr>
+            <p:ph idx="1"/>
+          </p:nvPr>
+        </p:nvSpPr>
+        <p:spPr/>
+        <p:txBody>
+          <a:bodyPr/>
+          <a:lstStyle/>
+          <a:p>
+            <a:r>
+              <a:rPr lang="en-US" altLang="en-US" dirty="0"/>
+              <a:t>Example: The language </a:t>
+            </a:r>
+            <a:r>
+              <a:rPr lang="en-US" altLang="en-US" b="1" dirty="0"/>
+              <a:t>EQUAL</a:t>
+            </a:r>
+            <a:r>
+              <a:rPr lang="en-US" altLang="en-US" dirty="0"/>
+              <a:t>, of strings with number of a’s equal to number of b’s, defined over </a:t>
+            </a:r>
+            <a:r>
+              <a:rPr lang="el-GR" altLang="en-US" dirty="0"/>
+              <a:t>Σ</a:t>
+            </a:r>
+            <a:r>
+              <a:rPr lang="en-US" altLang="en-US" dirty="0"/>
+              <a:t>={</a:t>
+            </a:r>
+            <a:r>
+              <a:rPr lang="en-US" altLang="en-US" dirty="0" err="1"/>
+              <a:t>a,b</a:t>
+            </a:r>
+            <a:r>
+              <a:rPr lang="en-US" altLang="en-US" dirty="0"/>
+              <a:t>}, can be written as</a:t>
+            </a:r>
+          </a:p>
+          <a:p>
+            <a:pPr>
+              <a:buNone/>
+            </a:pPr>
+            <a:r>
+              <a:rPr lang="en-US" altLang="en-US" dirty="0"/>
+              <a:t>	{</a:t>
+            </a:r>
+            <a:r>
+              <a:rPr lang="el-GR" altLang="en-US" sz="3000" dirty="0"/>
+              <a:t>Λ</a:t>
+            </a:r>
+            <a:r>
+              <a:rPr lang="en-US" altLang="en-US" dirty="0"/>
+              <a:t> ,</a:t>
+            </a:r>
+            <a:r>
+              <a:rPr lang="en-US" altLang="en-US" dirty="0" err="1"/>
+              <a:t>ab,aabb,abab,baba,abba</a:t>
+            </a:r>
+            <a:r>
+              <a:rPr lang="en-US" altLang="en-US" dirty="0"/>
+              <a:t>,…}</a:t>
+            </a:r>
+          </a:p>
+          <a:p>
+            <a:r>
+              <a:rPr lang="en-US" altLang="en-US" dirty="0"/>
+              <a:t>Example: The language </a:t>
+            </a:r>
+            <a:r>
+              <a:rPr lang="en-US" altLang="en-US" b="1" dirty="0"/>
+              <a:t>EVEN-EVEN</a:t>
+            </a:r>
+            <a:r>
+              <a:rPr lang="en-US" altLang="en-US" dirty="0"/>
+              <a:t>, of strings with even number of a’s and even number of b’s, defined over </a:t>
+            </a:r>
+            <a:r>
+              <a:rPr lang="el-GR" altLang="en-US" dirty="0"/>
+              <a:t>Σ</a:t>
+            </a:r>
+            <a:r>
+              <a:rPr lang="en-US" altLang="en-US" dirty="0"/>
+              <a:t>={</a:t>
+            </a:r>
+            <a:r>
+              <a:rPr lang="en-US" altLang="en-US" dirty="0" err="1"/>
+              <a:t>a,b</a:t>
+            </a:r>
+            <a:r>
+              <a:rPr lang="en-US" altLang="en-US" dirty="0"/>
+              <a:t>}, can be written as</a:t>
+            </a:r>
+          </a:p>
+          <a:p>
+            <a:pPr>
+              <a:buNone/>
+            </a:pPr>
+            <a:r>
+              <a:rPr lang="en-US" altLang="en-US" sz="2400" dirty="0"/>
+              <a:t>	</a:t>
+            </a:r>
+            <a:r>
+              <a:rPr lang="en-US" altLang="en-US" dirty="0"/>
+              <a:t>{</a:t>
+            </a:r>
+            <a:r>
+              <a:rPr lang="el-GR" altLang="en-US" dirty="0"/>
+              <a:t>Λ</a:t>
+            </a:r>
+            <a:r>
+              <a:rPr lang="en-US" altLang="en-US" dirty="0"/>
+              <a:t>, aa, bb, </a:t>
+            </a:r>
+            <a:r>
+              <a:rPr lang="en-US" altLang="en-US" dirty="0" err="1"/>
+              <a:t>aaaa,aabb,abab</a:t>
+            </a:r>
+            <a:r>
+              <a:rPr lang="en-US" altLang="en-US" dirty="0"/>
+              <a:t>, abba, </a:t>
+            </a:r>
+            <a:r>
+              <a:rPr lang="en-US" altLang="en-US" dirty="0" err="1"/>
+              <a:t>baab</a:t>
+            </a:r>
+            <a:r>
+              <a:rPr lang="en-US" altLang="en-US" dirty="0"/>
+              <a:t>, baba, </a:t>
+            </a:r>
+            <a:r>
+              <a:rPr lang="en-US" altLang="en-US" dirty="0" err="1"/>
+              <a:t>bbaa</a:t>
+            </a:r>
+            <a:r>
+              <a:rPr lang="en-US" altLang="en-US" dirty="0"/>
+              <a:t>, </a:t>
+            </a:r>
+            <a:r>
+              <a:rPr lang="en-US" altLang="en-US" dirty="0" err="1"/>
+              <a:t>bbbb</a:t>
+            </a:r>
+            <a:r>
+              <a:rPr lang="en-US" altLang="en-US" dirty="0"/>
+              <a:t>,…}</a:t>
+            </a:r>
+            <a:endParaRPr lang="en-US" altLang="en-US" sz="2400" dirty="0"/>
+          </a:p>
+          <a:p>
+            <a:endParaRPr lang="en-US" dirty="0"/>
+          </a:p>
+        </p:txBody>
+      </p:sp>
+    </p:spTree>
+    <p:extLst>
+      <p:ext uri="{BB962C8B-B14F-4D97-AF65-F5344CB8AC3E}">
+        <p14:creationId xmlns:p14="http://schemas.microsoft.com/office/powerpoint/2010/main" val="116247898"/>
+      </p:ext>
+    </p:extLst>
+  </p:cSld>
+  <p:clrMapOvr>
+    <a:masterClrMapping/>
+  </p:clrMapOvr>
+</p:sld>
+</file>
+
+<file path=ppt/slides/slide7.xml><?xml version="1.0" encoding="utf-8"?>
+<p:sld xmlns:a="http://schemas.openxmlformats.org/drawingml/2006/main" xmlns:r="http://schemas.openxmlformats.org/officeDocument/2006/relationships" xmlns:p="http://schemas.openxmlformats.org/presentationml/2006/main">
+  <p:cSld>
+    <p:spTree>
+      <p:nvGrpSpPr>
+        <p:cNvPr id="1" name=""/>
+        <p:cNvGrpSpPr/>
+        <p:nvPr/>
+      </p:nvGrpSpPr>
+      <p:grpSpPr>
+        <a:xfrm>
+          <a:off x="0" y="0"/>
+          <a:ext cx="0" cy="0"/>
+          <a:chOff x="0" y="0"/>
+          <a:chExt cx="0" cy="0"/>
+        </a:xfrm>
+      </p:grpSpPr>
+      <p:sp>
+        <p:nvSpPr>
+          <p:cNvPr id="2" name="Title 1">
+            <a:extLst>
+              <a:ext uri="{FF2B5EF4-FFF2-40B4-BE49-F238E27FC236}">
+                <a16:creationId xmlns:a16="http://schemas.microsoft.com/office/drawing/2014/main" id="{50442DA7-AB23-313F-8F79-A4F80D74E5DF}"/>
+              </a:ext>
+            </a:extLst>
+          </p:cNvPr>
+          <p:cNvSpPr>
+            <a:spLocks noGrp="1"/>
+          </p:cNvSpPr>
+          <p:nvPr>
+            <p:ph type="title"/>
+          </p:nvPr>
+        </p:nvSpPr>
+        <p:spPr/>
+        <p:txBody>
+          <a:bodyPr/>
+          <a:lstStyle/>
+          <a:p>
+            <a:r>
+              <a:rPr lang="en-US" dirty="0"/>
+              <a:t>Language</a:t>
+            </a:r>
+          </a:p>
+        </p:txBody>
+      </p:sp>
+      <p:sp>
+        <p:nvSpPr>
+          <p:cNvPr id="3" name="Content Placeholder 2">
+            <a:extLst>
+              <a:ext uri="{FF2B5EF4-FFF2-40B4-BE49-F238E27FC236}">
+                <a16:creationId xmlns:a16="http://schemas.microsoft.com/office/drawing/2014/main" id="{75829799-ED22-CB57-6471-A3BE63D7A38C}"/>
+              </a:ext>
+            </a:extLst>
+          </p:cNvPr>
+          <p:cNvSpPr>
+            <a:spLocks noGrp="1"/>
+          </p:cNvSpPr>
+          <p:nvPr>
+            <p:ph idx="1"/>
+          </p:nvPr>
+        </p:nvSpPr>
+        <p:spPr/>
+        <p:txBody>
+          <a:bodyPr/>
+          <a:lstStyle/>
+          <a:p>
+            <a:r>
+              <a:rPr lang="en-US" altLang="en-US" dirty="0"/>
+              <a:t>Example: The language {</a:t>
+            </a:r>
+            <a:r>
+              <a:rPr lang="en-US" altLang="en-US" dirty="0" err="1"/>
+              <a:t>a</a:t>
+            </a:r>
+            <a:r>
+              <a:rPr lang="en-US" altLang="en-US" baseline="40000" dirty="0" err="1"/>
+              <a:t>n</a:t>
+            </a:r>
+            <a:r>
+              <a:rPr lang="en-US" altLang="en-US" dirty="0" err="1"/>
+              <a:t>b</a:t>
+            </a:r>
+            <a:r>
+              <a:rPr lang="en-US" altLang="en-US" baseline="40000" dirty="0" err="1"/>
+              <a:t>n</a:t>
+            </a:r>
+            <a:r>
+              <a:rPr lang="en-US" altLang="en-US" baseline="40000" dirty="0"/>
+              <a:t> </a:t>
+            </a:r>
+            <a:r>
+              <a:rPr lang="en-US" altLang="en-US" dirty="0"/>
+              <a:t>}, of strings defined over </a:t>
+            </a:r>
+            <a:r>
+              <a:rPr lang="el-GR" altLang="en-US" dirty="0"/>
+              <a:t>Σ</a:t>
+            </a:r>
+            <a:r>
+              <a:rPr lang="en-US" altLang="en-US" dirty="0"/>
+              <a:t>={</a:t>
+            </a:r>
+            <a:r>
+              <a:rPr lang="en-US" altLang="en-US" dirty="0" err="1"/>
+              <a:t>a,b</a:t>
+            </a:r>
+            <a:r>
+              <a:rPr lang="en-US" altLang="en-US" dirty="0"/>
+              <a:t>}, as </a:t>
+            </a:r>
+          </a:p>
+          <a:p>
+            <a:pPr>
+              <a:buNone/>
+            </a:pPr>
+            <a:r>
+              <a:rPr lang="en-US" altLang="en-US" dirty="0"/>
+              <a:t>	{a</a:t>
+            </a:r>
+            <a:r>
+              <a:rPr lang="en-US" altLang="en-US" baseline="40000" dirty="0"/>
+              <a:t>n</a:t>
+            </a:r>
+            <a:r>
+              <a:rPr lang="en-US" altLang="en-US" sz="800" baseline="40000" dirty="0"/>
+              <a:t> </a:t>
+            </a:r>
+            <a:r>
+              <a:rPr lang="en-US" altLang="en-US" baseline="40000" dirty="0"/>
+              <a:t> </a:t>
+            </a:r>
+            <a:r>
+              <a:rPr lang="en-US" altLang="en-US" dirty="0"/>
+              <a:t>b</a:t>
+            </a:r>
+            <a:r>
+              <a:rPr lang="en-US" altLang="en-US" baseline="40000" dirty="0"/>
+              <a:t>n</a:t>
+            </a:r>
+            <a:r>
+              <a:rPr lang="en-US" altLang="en-US" sz="800" baseline="40000" dirty="0"/>
+              <a:t> </a:t>
+            </a:r>
+            <a:r>
+              <a:rPr lang="en-US" altLang="en-US" baseline="40000" dirty="0"/>
+              <a:t> </a:t>
+            </a:r>
+            <a:r>
+              <a:rPr lang="en-US" altLang="en-US" dirty="0"/>
+              <a:t>: n=1,2,3,…}, can be written as</a:t>
+            </a:r>
+          </a:p>
+          <a:p>
+            <a:pPr>
+              <a:buNone/>
+            </a:pPr>
+            <a:r>
+              <a:rPr lang="en-US" altLang="en-US" dirty="0"/>
+              <a:t>	{ab, </a:t>
+            </a:r>
+            <a:r>
+              <a:rPr lang="en-US" altLang="en-US" dirty="0" err="1"/>
+              <a:t>aabb</a:t>
+            </a:r>
+            <a:r>
+              <a:rPr lang="en-US" altLang="en-US" dirty="0"/>
+              <a:t>, </a:t>
+            </a:r>
+            <a:r>
+              <a:rPr lang="en-US" altLang="en-US" dirty="0" err="1"/>
+              <a:t>aaabbb,aaaabbbb</a:t>
+            </a:r>
+            <a:r>
+              <a:rPr lang="en-US" altLang="en-US" dirty="0"/>
+              <a:t>,…}</a:t>
+            </a:r>
+          </a:p>
+          <a:p>
+            <a:pPr>
+              <a:buNone/>
+            </a:pPr>
+            <a:endParaRPr lang="en-US" altLang="en-US" sz="2000" baseline="90000" dirty="0"/>
+          </a:p>
+          <a:p>
+            <a:r>
+              <a:rPr lang="en-US" altLang="en-US" dirty="0"/>
+              <a:t>Example: The language {</a:t>
+            </a:r>
+            <a:r>
+              <a:rPr lang="en-US" altLang="en-US" dirty="0" err="1"/>
+              <a:t>a</a:t>
+            </a:r>
+            <a:r>
+              <a:rPr lang="en-US" altLang="en-US" baseline="40000" dirty="0" err="1"/>
+              <a:t>n</a:t>
+            </a:r>
+            <a:r>
+              <a:rPr lang="en-US" altLang="en-US" dirty="0" err="1"/>
+              <a:t>b</a:t>
+            </a:r>
+            <a:r>
+              <a:rPr lang="en-US" altLang="en-US" baseline="40000" dirty="0" err="1"/>
+              <a:t>n</a:t>
+            </a:r>
+            <a:r>
+              <a:rPr lang="en-US" altLang="en-US" dirty="0" err="1"/>
+              <a:t>a</a:t>
+            </a:r>
+            <a:r>
+              <a:rPr lang="en-US" altLang="en-US" baseline="40000" dirty="0" err="1"/>
+              <a:t>n</a:t>
+            </a:r>
+            <a:r>
+              <a:rPr lang="en-US" altLang="en-US" baseline="40000" dirty="0"/>
+              <a:t> </a:t>
+            </a:r>
+            <a:r>
+              <a:rPr lang="en-US" altLang="en-US" dirty="0"/>
+              <a:t>}, of strings defined over </a:t>
+            </a:r>
+            <a:r>
+              <a:rPr lang="el-GR" altLang="en-US" dirty="0"/>
+              <a:t>Σ</a:t>
+            </a:r>
+            <a:r>
+              <a:rPr lang="en-US" altLang="en-US" dirty="0"/>
+              <a:t>={</a:t>
+            </a:r>
+            <a:r>
+              <a:rPr lang="en-US" altLang="en-US" dirty="0" err="1"/>
+              <a:t>a,b</a:t>
+            </a:r>
+            <a:r>
+              <a:rPr lang="en-US" altLang="en-US" dirty="0"/>
+              <a:t>}, as </a:t>
+            </a:r>
+          </a:p>
+          <a:p>
+            <a:pPr>
+              <a:buNone/>
+            </a:pPr>
+            <a:r>
+              <a:rPr lang="en-US" altLang="en-US" dirty="0"/>
+              <a:t>	{a</a:t>
+            </a:r>
+            <a:r>
+              <a:rPr lang="en-US" altLang="en-US" baseline="40000" dirty="0"/>
+              <a:t>n</a:t>
+            </a:r>
+            <a:r>
+              <a:rPr lang="en-US" altLang="en-US" sz="800" baseline="40000" dirty="0"/>
+              <a:t> </a:t>
+            </a:r>
+            <a:r>
+              <a:rPr lang="en-US" altLang="en-US" dirty="0"/>
+              <a:t>b</a:t>
+            </a:r>
+            <a:r>
+              <a:rPr lang="en-US" altLang="en-US" baseline="40000" dirty="0"/>
+              <a:t>n</a:t>
+            </a:r>
+            <a:r>
+              <a:rPr lang="en-US" altLang="en-US" sz="800" baseline="40000" dirty="0"/>
+              <a:t> </a:t>
+            </a:r>
+            <a:r>
+              <a:rPr lang="en-US" altLang="en-US" dirty="0"/>
+              <a:t>a</a:t>
+            </a:r>
+            <a:r>
+              <a:rPr lang="en-US" altLang="en-US" baseline="40000" dirty="0"/>
+              <a:t>n</a:t>
+            </a:r>
+            <a:r>
+              <a:rPr lang="en-US" altLang="en-US" dirty="0"/>
+              <a:t>: n=1,2,3,…}, can be written as</a:t>
+            </a:r>
+          </a:p>
+          <a:p>
+            <a:pPr>
+              <a:buNone/>
+            </a:pPr>
+            <a:r>
+              <a:rPr lang="en-US" altLang="en-US" dirty="0"/>
+              <a:t>	{aba, </a:t>
+            </a:r>
+            <a:r>
+              <a:rPr lang="en-US" altLang="en-US" dirty="0" err="1"/>
+              <a:t>aabbaa</a:t>
+            </a:r>
+            <a:r>
+              <a:rPr lang="en-US" altLang="en-US" dirty="0"/>
+              <a:t>, </a:t>
+            </a:r>
+            <a:r>
+              <a:rPr lang="en-US" altLang="en-US" dirty="0" err="1"/>
+              <a:t>aaabbbaaa,aaaabbbbaaaa</a:t>
+            </a:r>
+            <a:r>
+              <a:rPr lang="en-US" altLang="en-US" dirty="0"/>
+              <a:t>,…}</a:t>
+            </a:r>
+          </a:p>
+          <a:p>
+            <a:endParaRPr lang="en-US" dirty="0"/>
+          </a:p>
+        </p:txBody>
+      </p:sp>
+    </p:spTree>
+    <p:extLst>
+      <p:ext uri="{BB962C8B-B14F-4D97-AF65-F5344CB8AC3E}">
+        <p14:creationId xmlns:p14="http://schemas.microsoft.com/office/powerpoint/2010/main" val="114574682"/>
+      </p:ext>
+    </p:extLst>
+  </p:cSld>
+  <p:clrMapOvr>
+    <a:masterClrMapping/>
+  </p:clrMapOvr>
+</p:sld>
+</file>
+
+<file path=ppt/slides/slide8.xml><?xml version="1.0" encoding="utf-8"?>
+<p:sld xmlns:a="http://schemas.openxmlformats.org/drawingml/2006/main" xmlns:r="http://schemas.openxmlformats.org/officeDocument/2006/relationships" xmlns:p="http://schemas.openxmlformats.org/presentationml/2006/main">
+  <p:cSld>
+    <p:spTree>
+      <p:nvGrpSpPr>
+        <p:cNvPr id="1" name=""/>
+        <p:cNvGrpSpPr/>
+        <p:nvPr/>
+      </p:nvGrpSpPr>
+      <p:grpSpPr>
+        <a:xfrm>
+          <a:off x="0" y="0"/>
+          <a:ext cx="0" cy="0"/>
+          <a:chOff x="0" y="0"/>
+          <a:chExt cx="0" cy="0"/>
+        </a:xfrm>
+      </p:grpSpPr>
+      <p:sp>
+        <p:nvSpPr>
+          <p:cNvPr id="2" name="Title 1">
+            <a:extLst>
+              <a:ext uri="{FF2B5EF4-FFF2-40B4-BE49-F238E27FC236}">
+                <a16:creationId xmlns:a16="http://schemas.microsoft.com/office/drawing/2014/main" id="{0D8F25CD-93EA-A313-8004-34B3323C7189}"/>
+              </a:ext>
+            </a:extLst>
+          </p:cNvPr>
+          <p:cNvSpPr>
+            <a:spLocks noGrp="1"/>
+          </p:cNvSpPr>
+          <p:nvPr>
+            <p:ph type="title"/>
+          </p:nvPr>
+        </p:nvSpPr>
+        <p:spPr/>
+        <p:txBody>
+          <a:bodyPr/>
+          <a:lstStyle/>
+          <a:p>
+            <a:r>
+              <a:rPr lang="en-US" dirty="0"/>
+              <a:t>language</a:t>
+            </a:r>
+          </a:p>
+        </p:txBody>
+      </p:sp>
+      <p:sp>
+        <p:nvSpPr>
+          <p:cNvPr id="3" name="Content Placeholder 2">
+            <a:extLst>
+              <a:ext uri="{FF2B5EF4-FFF2-40B4-BE49-F238E27FC236}">
+                <a16:creationId xmlns:a16="http://schemas.microsoft.com/office/drawing/2014/main" id="{D296CC4B-56F8-D859-6F30-B7E686E0CB08}"/>
+              </a:ext>
+            </a:extLst>
+          </p:cNvPr>
+          <p:cNvSpPr>
+            <a:spLocks noGrp="1"/>
+          </p:cNvSpPr>
+          <p:nvPr>
+            <p:ph idx="1"/>
+          </p:nvPr>
+        </p:nvSpPr>
+        <p:spPr/>
+        <p:txBody>
+          <a:bodyPr/>
+          <a:lstStyle/>
+          <a:p>
+            <a:r>
+              <a:rPr lang="en-US" altLang="en-US" dirty="0"/>
+              <a:t>Example: The language </a:t>
+            </a:r>
+            <a:r>
+              <a:rPr lang="en-US" altLang="en-US" b="1" dirty="0"/>
+              <a:t>factorial</a:t>
+            </a:r>
+            <a:r>
+              <a:rPr lang="en-US" altLang="en-US" dirty="0"/>
+              <a:t>, of strings defined over </a:t>
+            </a:r>
+            <a:r>
+              <a:rPr lang="el-GR" altLang="en-US" dirty="0"/>
+              <a:t>Σ</a:t>
+            </a:r>
+            <a:r>
+              <a:rPr lang="en-US" altLang="en-US" dirty="0"/>
+              <a:t>={1,2,3,4,5,6,7,8,9} </a:t>
+            </a:r>
+            <a:r>
+              <a:rPr lang="en-US" altLang="en-US" i="1" dirty="0"/>
+              <a:t>i.e.</a:t>
+            </a:r>
+          </a:p>
+          <a:p>
+            <a:pPr>
+              <a:buNone/>
+            </a:pPr>
+            <a:r>
+              <a:rPr lang="en-US" altLang="en-US" i="1" dirty="0"/>
+              <a:t>	</a:t>
+            </a:r>
+            <a:r>
+              <a:rPr lang="en-US" altLang="en-US" dirty="0"/>
+              <a:t>{1,2,6,24,120,…}</a:t>
+            </a:r>
+          </a:p>
+          <a:p>
+            <a:r>
+              <a:rPr lang="en-US" altLang="en-US" dirty="0"/>
+              <a:t>Example: The language </a:t>
+            </a:r>
+            <a:r>
+              <a:rPr lang="en-US" altLang="en-US" b="1" dirty="0"/>
+              <a:t>FACTORIAL</a:t>
+            </a:r>
+            <a:r>
+              <a:rPr lang="en-US" altLang="en-US" dirty="0"/>
+              <a:t>, of strings defined over </a:t>
+            </a:r>
+            <a:r>
+              <a:rPr lang="el-GR" altLang="en-US" dirty="0"/>
+              <a:t>Σ</a:t>
+            </a:r>
+            <a:r>
+              <a:rPr lang="en-US" altLang="en-US" dirty="0"/>
+              <a:t>={a}, as </a:t>
+            </a:r>
+          </a:p>
+          <a:p>
+            <a:pPr>
+              <a:buNone/>
+            </a:pPr>
+            <a:r>
+              <a:rPr lang="en-US" altLang="en-US" dirty="0"/>
+              <a:t>	{a</a:t>
+            </a:r>
+            <a:r>
+              <a:rPr lang="en-US" altLang="en-US" baseline="40000" dirty="0"/>
+              <a:t>n! </a:t>
+            </a:r>
+            <a:r>
+              <a:rPr lang="en-US" altLang="en-US" dirty="0"/>
+              <a:t>: n=1,2,3,…}, can be written as</a:t>
+            </a:r>
+          </a:p>
+          <a:p>
+            <a:pPr>
+              <a:buNone/>
+            </a:pPr>
+            <a:r>
+              <a:rPr lang="en-US" altLang="en-US" dirty="0"/>
+              <a:t>	{</a:t>
+            </a:r>
+            <a:r>
+              <a:rPr lang="en-US" altLang="en-US" dirty="0" err="1"/>
+              <a:t>a,aa,aaaaaa</a:t>
+            </a:r>
+            <a:r>
+              <a:rPr lang="en-US" altLang="en-US" dirty="0"/>
+              <a:t>,…}. It is to be noted that the language FACTORIAL can be defined over any single letter alphabet.</a:t>
+            </a:r>
+          </a:p>
+          <a:p>
+            <a:pPr>
+              <a:buNone/>
+            </a:pPr>
+            <a:endParaRPr lang="en-US" altLang="en-US" dirty="0"/>
+          </a:p>
+          <a:p>
+            <a:endParaRPr lang="en-US" dirty="0"/>
+          </a:p>
+        </p:txBody>
+      </p:sp>
+    </p:spTree>
+    <p:extLst>
+      <p:ext uri="{BB962C8B-B14F-4D97-AF65-F5344CB8AC3E}">
+        <p14:creationId xmlns:p14="http://schemas.microsoft.com/office/powerpoint/2010/main" val="1771268618"/>
+      </p:ext>
+    </p:extLst>
+  </p:cSld>
+  <p:clrMapOvr>
+    <a:masterClrMapping/>
+  </p:clrMapOvr>
+</p:sld>
+</file>
+
+<file path=ppt/slides/slide9.xml><?xml version="1.0" encoding="utf-8"?>
+<p:sld xmlns:a="http://schemas.openxmlformats.org/drawingml/2006/main" xmlns:r="http://schemas.openxmlformats.org/officeDocument/2006/relationships" xmlns:p="http://schemas.openxmlformats.org/presentationml/2006/main">
+  <p:cSld>
+    <p:spTree>
+      <p:nvGrpSpPr>
+        <p:cNvPr id="1" name=""/>
+        <p:cNvGrpSpPr/>
+        <p:nvPr/>
+      </p:nvGrpSpPr>
+      <p:grpSpPr>
+        <a:xfrm>
+          <a:off x="0" y="0"/>
+          <a:ext cx="0" cy="0"/>
+          <a:chOff x="0" y="0"/>
+          <a:chExt cx="0" cy="0"/>
+        </a:xfrm>
+      </p:grpSpPr>
+      <p:sp>
+        <p:nvSpPr>
+          <p:cNvPr id="2" name="Title 1">
+            <a:extLst>
+              <a:ext uri="{FF2B5EF4-FFF2-40B4-BE49-F238E27FC236}">
+                <a16:creationId xmlns:a16="http://schemas.microsoft.com/office/drawing/2014/main" id="{4DC5DC0F-19A1-1153-77E8-474ADBB47773}"/>
+              </a:ext>
+            </a:extLst>
+          </p:cNvPr>
+          <p:cNvSpPr>
+            <a:spLocks noGrp="1"/>
+          </p:cNvSpPr>
+          <p:nvPr>
+            <p:ph type="title"/>
+          </p:nvPr>
+        </p:nvSpPr>
+        <p:spPr/>
+        <p:txBody>
+          <a:bodyPr/>
+          <a:lstStyle/>
+          <a:p>
+            <a:r>
+              <a:rPr lang="en-US" dirty="0"/>
+              <a:t>task</a:t>
+            </a:r>
+          </a:p>
+        </p:txBody>
+      </p:sp>
+      <p:sp>
+        <p:nvSpPr>
+          <p:cNvPr id="3" name="Content Placeholder 2">
+            <a:extLst>
+              <a:ext uri="{FF2B5EF4-FFF2-40B4-BE49-F238E27FC236}">
+                <a16:creationId xmlns:a16="http://schemas.microsoft.com/office/drawing/2014/main" id="{B8936C5A-B39C-E476-DC39-F30A6AD71DB5}"/>
+              </a:ext>
+            </a:extLst>
+          </p:cNvPr>
+          <p:cNvSpPr>
+            <a:spLocks noGrp="1"/>
+          </p:cNvSpPr>
+          <p:nvPr>
+            <p:ph idx="1"/>
+          </p:nvPr>
+        </p:nvSpPr>
+        <p:spPr/>
+        <p:txBody>
+          <a:bodyPr/>
+          <a:lstStyle/>
+          <a:p>
+            <a:r>
+              <a:rPr lang="en-US" dirty="0"/>
+              <a:t>Let S={a, bb, </a:t>
+            </a:r>
+            <a:r>
+              <a:rPr lang="en-US" dirty="0" err="1"/>
+              <a:t>bab</a:t>
+            </a:r>
+            <a:r>
+              <a:rPr lang="en-US" dirty="0"/>
+              <a:t>, </a:t>
+            </a:r>
+            <a:r>
+              <a:rPr lang="en-US" dirty="0" err="1"/>
+              <a:t>abaab</a:t>
+            </a:r>
+            <a:r>
+              <a:rPr lang="en-US" dirty="0"/>
+              <a:t>} be a set of strings. Are </a:t>
+            </a:r>
+            <a:r>
+              <a:rPr lang="en-US" dirty="0" err="1"/>
+              <a:t>abbabaabab</a:t>
+            </a:r>
+            <a:r>
+              <a:rPr lang="en-US" dirty="0"/>
+              <a:t> and </a:t>
+            </a:r>
+            <a:r>
+              <a:rPr lang="en-US" dirty="0" err="1"/>
+              <a:t>baabbbabbaabb</a:t>
+            </a:r>
+            <a:r>
+              <a:rPr lang="en-US" dirty="0"/>
+              <a:t> in S*? Does any word in S* have odd  number of b’s?</a:t>
+            </a:r>
+          </a:p>
+        </p:txBody>
+      </p:sp>
+    </p:spTree>
+    <p:extLst>
+      <p:ext uri="{BB962C8B-B14F-4D97-AF65-F5344CB8AC3E}">
+        <p14:creationId xmlns:p14="http://schemas.microsoft.com/office/powerpoint/2010/main" val="2189152735"/>
+      </p:ext>
+    </p:extLst>
   </p:cSld>
   <p:clrMapOvr>
     <a:masterClrMapping/>
